--- a/SelfHelp-2026-latest.pptx
+++ b/SelfHelp-2026-latest.pptx
@@ -2896,44 +2896,52 @@
           </a:p>
           <a:p>
             <a:r>
-              <a:rPr lang="en-US" dirty="0"/>
+              <a:rPr lang="en-US" i="1" dirty="0"/>
               <a:t>If you compare this to tools like </a:t>
             </a:r>
             <a:r>
-              <a:rPr lang="en-US" b="1" dirty="0"/>
+              <a:rPr lang="en-US" b="1" i="1" dirty="0"/>
               <a:t>Qualtrics or </a:t>
             </a:r>
             <a:r>
-              <a:rPr lang="en-US" b="1" dirty="0" err="1"/>
+              <a:rPr lang="en-US" b="1" i="1" dirty="0" err="1"/>
               <a:t>REDCap</a:t>
             </a:r>
             <a:r>
-              <a:rPr lang="en-US" dirty="0"/>
+              <a:rPr lang="en-US" i="1" dirty="0"/>
               <a:t>, the key </a:t>
             </a:r>
             <a:r>
-              <a:rPr lang="en-US" b="1" dirty="0"/>
+              <a:rPr lang="en-US" b="1" i="1" dirty="0"/>
               <a:t>difference is integration</a:t>
             </a:r>
             <a:r>
-              <a:rPr lang="en-US" dirty="0"/>
+              <a:rPr lang="en-US" i="1" dirty="0"/>
               <a:t>.</a:t>
             </a:r>
           </a:p>
           <a:p>
             <a:r>
-              <a:rPr lang="en-US" dirty="0"/>
+              <a:rPr lang="en-US" i="1" dirty="0"/>
               <a:t>Instead of connecting multiple platforms, everything is </a:t>
             </a:r>
             <a:r>
-              <a:rPr lang="en-US" b="1" dirty="0"/>
+              <a:rPr lang="en-US" b="1" i="1" dirty="0"/>
               <a:t>built directly into our CMS.</a:t>
             </a:r>
           </a:p>
           <a:p>
             <a:r>
               <a:rPr lang="en-US" dirty="0"/>
-              <a:t>So we don’t just use surveys—we </a:t>
+              <a:t>As a </a:t>
+            </a:r>
+            <a:r>
+              <a:rPr lang="en-US"/>
+              <a:t>summary we </a:t>
+            </a:r>
+            <a:r>
+              <a:rPr lang="en-US" dirty="0"/>
+              <a:t>don’t just use surveys—we </a:t>
             </a:r>
             <a:r>
               <a:rPr lang="en-US" b="1" dirty="0"/>
@@ -3616,14 +3624,7 @@
             </a:r>
             <a:r>
               <a:rPr lang="en-US" dirty="0"/>
-              <a:t> for the AI,</a:t>
-            </a:r>
-            <a:br>
-              <a:rPr lang="en-US" dirty="0"/>
-            </a:br>
-            <a:r>
-              <a:rPr lang="en-US" dirty="0"/>
-              <a:t>helping to </a:t>
+              <a:t> for the AI, helping to </a:t>
             </a:r>
             <a:r>
               <a:rPr lang="en-US" b="1" dirty="0"/>

--- a/SelfHelp-2026-latest.pptx
+++ b/SelfHelp-2026-latest.pptx
@@ -118,6 +118,11 @@
       </a:defRPr>
     </a:lvl9pPr>
   </p:defaultTextStyle>
+  <p:extLst>
+    <p:ext uri="{EFAFB233-063F-42B5-8137-9DF3F51BA10A}">
+      <p15:sldGuideLst xmlns:p15="http://schemas.microsoft.com/office/powerpoint/2012/main"/>
+    </p:ext>
+  </p:extLst>
 </p:presentation>
 </file>
 
@@ -203,7 +208,7 @@
           <a:p>
             <a:fld id="{73A77C81-42E9-4F91-A8F3-DD7B1A725B9E}" type="datetimeFigureOut">
               <a:rPr lang="LID4096" smtClean="0"/>
-              <a:t>03/28/2026</a:t>
+              <a:t>03/30/2026</a:t>
             </a:fld>
             <a:endParaRPr lang="LID4096"/>
           </a:p>
@@ -526,15 +531,15 @@
           <a:p>
             <a:r>
               <a:rPr lang="en-US" dirty="0"/>
-              <a:t>Some of you may remember that I already gave a presentation about </a:t>
+              <a:t>I am here to present </a:t>
             </a:r>
             <a:r>
               <a:rPr lang="en-US" dirty="0" err="1"/>
-              <a:t>SelfHelp</a:t>
-            </a:r>
-            <a:r>
-              <a:rPr lang="en-US" dirty="0"/>
-              <a:t> some years ago, I think it was in 2021.</a:t>
+              <a:t>Selfhelp</a:t>
+            </a:r>
+            <a:r>
+              <a:rPr lang="en-US" dirty="0"/>
+              <a:t>. Some of you may remember that I already gave a presentation about it some years ago, I think it was in 2021.</a:t>
             </a:r>
           </a:p>
           <a:p>
@@ -733,63 +738,7 @@
             </a:r>
             <a:r>
               <a:rPr lang="en-US" b="1" dirty="0"/>
-              <a:t>connection between all components</a:t>
-            </a:r>
-            <a:r>
-              <a:rPr lang="en-US" dirty="0"/>
-              <a:t>.</a:t>
-            </a:r>
-          </a:p>
-          <a:p>
-            <a:r>
-              <a:rPr lang="en-US" dirty="0" err="1"/>
-              <a:t>SelfHelp</a:t>
-            </a:r>
-            <a:r>
-              <a:rPr lang="en-US" dirty="0"/>
-              <a:t> </a:t>
-            </a:r>
-            <a:r>
-              <a:rPr lang="en-US" b="1" dirty="0"/>
-              <a:t>brings together:</a:t>
-            </a:r>
-          </a:p>
-          <a:p>
-            <a:pPr lvl="1"/>
-            <a:r>
-              <a:rPr lang="en-US" dirty="0"/>
-              <a:t>👉Surveys </a:t>
-            </a:r>
-          </a:p>
-          <a:p>
-            <a:pPr lvl="1"/>
-            <a:r>
-              <a:rPr lang="en-US" dirty="0"/>
-              <a:t>👉Workflows and follow-up processes </a:t>
-            </a:r>
-          </a:p>
-          <a:p>
-            <a:pPr lvl="1"/>
-            <a:r>
-              <a:rPr lang="en-US" dirty="0"/>
-              <a:t>👉Mobile usage </a:t>
-            </a:r>
-          </a:p>
-          <a:p>
-            <a:pPr lvl="1"/>
-            <a:r>
-              <a:rPr lang="en-US" dirty="0"/>
-              <a:t>👉And AI-supported features </a:t>
-            </a:r>
-          </a:p>
-          <a:p>
-            <a:r>
-              <a:rPr lang="en-US" dirty="0"/>
-              <a:t>—</a:t>
-            </a:r>
-            <a:r>
-              <a:rPr lang="en-US" b="1" dirty="0"/>
-              <a:t>all within a single platform.</a:t>
+              <a:t>connection between all components bringing them all within a single platform.</a:t>
             </a:r>
           </a:p>
           <a:p>
@@ -959,85 +908,23 @@
             </a:r>
             <a:r>
               <a:rPr lang="en-US" b="1" dirty="0"/>
-              <a:t>a single platform.</a:t>
-            </a:r>
-          </a:p>
-          <a:p>
-            <a:r>
-              <a:rPr lang="en-US" dirty="0"/>
-              <a:t>You can manage:</a:t>
-            </a:r>
-          </a:p>
-          <a:p>
-            <a:pPr lvl="1"/>
-            <a:r>
-              <a:rPr lang="en-US" dirty="0"/>
-              <a:t>👉Data </a:t>
-            </a:r>
-          </a:p>
-          <a:p>
-            <a:pPr lvl="1"/>
-            <a:r>
-              <a:rPr lang="en-US" dirty="0"/>
-              <a:t>👉Content </a:t>
-            </a:r>
-          </a:p>
-          <a:p>
-            <a:pPr lvl="1"/>
-            <a:r>
-              <a:rPr lang="en-US" dirty="0"/>
-              <a:t>👉Logic and workflows </a:t>
-            </a:r>
-          </a:p>
-          <a:p>
-            <a:pPr lvl="1"/>
-            <a:r>
-              <a:rPr lang="en-US" dirty="0"/>
-              <a:t>👉Scheduling and randomization </a:t>
-            </a:r>
-          </a:p>
-          <a:p>
-            <a:pPr lvl="1"/>
-            <a:r>
-              <a:rPr lang="en-US" dirty="0"/>
-              <a:t>👉Mobile usage </a:t>
-            </a:r>
-          </a:p>
-          <a:p>
-            <a:pPr lvl="1"/>
-            <a:r>
-              <a:rPr lang="en-US" dirty="0"/>
-              <a:t>👉And AI features </a:t>
-            </a:r>
-          </a:p>
-          <a:p>
-            <a:r>
-              <a:rPr lang="en-US" b="1" dirty="0"/>
-              <a:t>—all in one place</a:t>
-            </a:r>
-            <a:r>
-              <a:rPr lang="en-US" dirty="0"/>
-              <a:t>. All in the University servers</a:t>
-            </a:r>
-          </a:p>
-          <a:p>
-            <a:r>
-              <a:rPr lang="en-US" dirty="0"/>
-              <a:t>At the same time, the system is </a:t>
-            </a:r>
-            <a:r>
-              <a:rPr lang="en-US" b="1" dirty="0"/>
-              <a:t>continuously evolving </a:t>
-            </a:r>
-            <a:r>
-              <a:rPr lang="en-US" dirty="0"/>
-              <a:t>as we’ve already seen.</a:t>
-            </a:r>
-          </a:p>
-          <a:p>
-            <a:r>
-              <a:rPr lang="en-US" dirty="0"/>
-              <a:t>We are currently developing </a:t>
+              <a:t>a single platform </a:t>
+            </a:r>
+            <a:r>
+              <a:rPr lang="en-US" b="0" dirty="0"/>
+              <a:t>which can be installed locally in the University.</a:t>
+            </a:r>
+          </a:p>
+          <a:p>
+            <a:r>
+              <a:rPr lang="en-US" dirty="0"/>
+              <a:t>Also as we have seen, the system is continuously developed and supported.</a:t>
+            </a:r>
+          </a:p>
+          <a:p>
+            <a:r>
+              <a:rPr lang="en-US" dirty="0"/>
+              <a:t>We are even developing </a:t>
             </a:r>
             <a:r>
               <a:rPr lang="en-US" b="1" dirty="0" err="1"/>
@@ -1267,11 +1154,11 @@
             </a:r>
             <a:r>
               <a:rPr lang="en-US" b="1" dirty="0"/>
-              <a:t>Thomas Ber</a:t>
-            </a:r>
-            <a:r>
-              <a:rPr lang="en-US" dirty="0"/>
-              <a:t>ger and his group, as well as </a:t>
+              <a:t>Thomas Berger</a:t>
+            </a:r>
+            <a:r>
+              <a:rPr lang="en-US" dirty="0"/>
+              <a:t> and his group, as well as </a:t>
             </a:r>
             <a:r>
               <a:rPr lang="en-US" b="1" dirty="0"/>
@@ -1677,45 +1564,6 @@
               <a:t>over both the data and the system itself.</a:t>
             </a:r>
           </a:p>
-          <a:p>
-            <a:r>
-              <a:rPr lang="en-US" dirty="0"/>
-              <a:t>So in summary:</a:t>
-            </a:r>
-          </a:p>
-          <a:p>
-            <a:r>
-              <a:rPr lang="en-US" dirty="0"/>
-              <a:t>👉 </a:t>
-            </a:r>
-            <a:r>
-              <a:rPr lang="en-US" dirty="0" err="1"/>
-              <a:t>SelfHelp</a:t>
-            </a:r>
-            <a:r>
-              <a:rPr lang="en-US" dirty="0"/>
-              <a:t> connects </a:t>
-            </a:r>
-            <a:r>
-              <a:rPr lang="en-US" b="1" dirty="0"/>
-              <a:t>different digital needs </a:t>
-            </a:r>
-            <a:r>
-              <a:rPr lang="en-US" dirty="0"/>
-              <a:t>into </a:t>
-            </a:r>
-            <a:r>
-              <a:rPr lang="en-US" b="1" dirty="0"/>
-              <a:t>one integrated system</a:t>
-            </a:r>
-            <a:r>
-              <a:rPr lang="en-US" dirty="0"/>
-              <a:t>—and removes the fragmentation we often see in projects.</a:t>
-            </a:r>
-          </a:p>
-          <a:p>
-            <a:endParaRPr lang="LID4096" dirty="0"/>
-          </a:p>
         </p:txBody>
       </p:sp>
       <p:sp>
@@ -1913,7 +1761,7 @@
             </a:r>
             <a:r>
               <a:rPr lang="en-US" dirty="0"/>
-              <a:t>, but they were essential. We generalized and refined many core components to make the system more </a:t>
+              <a:t>, but they were essential. They made the system more </a:t>
             </a:r>
             <a:r>
               <a:rPr lang="en-US" b="1" dirty="0"/>
@@ -2121,15 +1969,7 @@
             <a:pPr lvl="1"/>
             <a:r>
               <a:rPr lang="en-US" dirty="0"/>
-              <a:t>👉 </a:t>
-            </a:r>
-            <a:r>
-              <a:rPr lang="en-US" dirty="0" err="1"/>
-              <a:t>Radnomize</a:t>
-            </a:r>
-            <a:r>
-              <a:rPr lang="en-US" dirty="0"/>
-              <a:t> them in groups</a:t>
+              <a:t>👉 Randomize them in groups</a:t>
             </a:r>
           </a:p>
           <a:p>
@@ -2809,30 +2649,11 @@
           <a:p>
             <a:r>
               <a:rPr lang="en-US" dirty="0"/>
-              <a:t>Another important feature is support for </a:t>
-            </a:r>
-            <a:r>
-              <a:rPr lang="en-US" b="1" dirty="0"/>
-              <a:t>rich input.</a:t>
-            </a:r>
-            <a:br>
-              <a:rPr lang="en-US" dirty="0"/>
-            </a:br>
-            <a:r>
-              <a:rPr lang="en-US" dirty="0"/>
-              <a:t>Users can </a:t>
-            </a:r>
-            <a:r>
-              <a:rPr lang="en-US" b="1" dirty="0"/>
-              <a:t>upload images, audio, or other files</a:t>
-            </a:r>
-            <a:r>
-              <a:rPr lang="en-US" dirty="0"/>
-              <a:t>, which allows for more </a:t>
-            </a:r>
-            <a:r>
-              <a:rPr lang="en-US" b="1" dirty="0"/>
-              <a:t>specialized use cases</a:t>
+              <a:t>In addition to the responses, we also collect </a:t>
+            </a:r>
+            <a:r>
+              <a:rPr lang="en-US" b="1" dirty="0"/>
+              <a:t>detailed metadata</a:t>
             </a:r>
             <a:r>
               <a:rPr lang="en-US" dirty="0"/>
@@ -2842,20 +2663,6 @@
           <a:p>
             <a:r>
               <a:rPr lang="en-US" dirty="0"/>
-              <a:t>In addition to the responses, we also collect </a:t>
-            </a:r>
-            <a:r>
-              <a:rPr lang="en-US" b="1" dirty="0"/>
-              <a:t>detailed metadata</a:t>
-            </a:r>
-            <a:r>
-              <a:rPr lang="en-US" dirty="0"/>
-              <a:t>.</a:t>
-            </a:r>
-          </a:p>
-          <a:p>
-            <a:r>
-              <a:rPr lang="en-US" dirty="0"/>
               <a:t>So we don’t just see the </a:t>
             </a:r>
             <a:r>
@@ -2891,57 +2698,13 @@
           <a:p>
             <a:r>
               <a:rPr lang="en-US" dirty="0"/>
-              <a:t>This gives us much deeper insight into user behavior.</a:t>
-            </a:r>
-          </a:p>
-          <a:p>
-            <a:r>
-              <a:rPr lang="en-US" i="1" dirty="0"/>
-              <a:t>If you compare this to tools like </a:t>
-            </a:r>
-            <a:r>
-              <a:rPr lang="en-US" b="1" i="1" dirty="0"/>
-              <a:t>Qualtrics or </a:t>
-            </a:r>
-            <a:r>
-              <a:rPr lang="en-US" b="1" i="1" dirty="0" err="1"/>
-              <a:t>REDCap</a:t>
-            </a:r>
-            <a:r>
-              <a:rPr lang="en-US" i="1" dirty="0"/>
-              <a:t>, the key </a:t>
-            </a:r>
-            <a:r>
-              <a:rPr lang="en-US" b="1" i="1" dirty="0"/>
-              <a:t>difference is integration</a:t>
-            </a:r>
-            <a:r>
-              <a:rPr lang="en-US" i="1" dirty="0"/>
-              <a:t>.</a:t>
-            </a:r>
-          </a:p>
-          <a:p>
-            <a:r>
-              <a:rPr lang="en-US" i="1" dirty="0"/>
-              <a:t>Instead of connecting multiple platforms, everything is </a:t>
-            </a:r>
-            <a:r>
-              <a:rPr lang="en-US" b="1" i="1" dirty="0"/>
-              <a:t>built directly into our CMS.</a:t>
-            </a:r>
-          </a:p>
-          <a:p>
-            <a:r>
-              <a:rPr lang="en-US" dirty="0"/>
-              <a:t>As a </a:t>
-            </a:r>
-            <a:r>
-              <a:rPr lang="en-US"/>
-              <a:t>summary we </a:t>
-            </a:r>
-            <a:r>
-              <a:rPr lang="en-US" dirty="0"/>
-              <a:t>don’t just use surveys—we </a:t>
+              <a:t>This gives us much deeper insight into users behavior.</a:t>
+            </a:r>
+          </a:p>
+          <a:p>
+            <a:r>
+              <a:rPr lang="en-US" dirty="0"/>
+              <a:t>As a summary we don’t just use surveys—we </a:t>
             </a:r>
             <a:r>
               <a:rPr lang="en-US" b="1" dirty="0"/>
@@ -3050,7 +2813,11 @@
             </a:r>
             <a:r>
               <a:rPr lang="en-US" b="1" dirty="0"/>
-              <a:t>in our system</a:t>
+              <a:t>in </a:t>
+            </a:r>
+            <a:r>
+              <a:rPr lang="en-US" b="1" dirty="0" err="1"/>
+              <a:t>SelfHelp</a:t>
             </a:r>
             <a:r>
               <a:rPr lang="en-US" dirty="0"/>
@@ -3224,7 +2991,7 @@
             </a:r>
           </a:p>
           <a:p>
-            <a:pPr lvl="0"/>
+            <a:pPr lvl="1"/>
             <a:r>
               <a:rPr lang="en-US" dirty="0"/>
               <a:t>So in simple terms:</a:t>
@@ -3338,7 +3105,7 @@
             <a:pPr lvl="1"/>
             <a:r>
               <a:rPr lang="en-US" dirty="0"/>
-              <a:t>👉And continuously refine everything based on results </a:t>
+              <a:t>👉And continuously refine everything based on the results </a:t>
             </a:r>
           </a:p>
           <a:p>
@@ -3652,44 +3419,6 @@
           <a:p>
             <a:r>
               <a:rPr lang="en-US" dirty="0"/>
-              <a:t>We also </a:t>
-            </a:r>
-            <a:r>
-              <a:rPr lang="en-US" b="1" dirty="0"/>
-              <a:t>implemented several safety features:</a:t>
-            </a:r>
-          </a:p>
-          <a:p>
-            <a:pPr lvl="1"/>
-            <a:r>
-              <a:rPr lang="en-US" dirty="0"/>
-              <a:t>👉Risk detection and alerts </a:t>
-            </a:r>
-          </a:p>
-          <a:p>
-            <a:pPr lvl="1"/>
-            <a:r>
-              <a:rPr lang="en-US" dirty="0"/>
-              <a:t>👉The ability to pause AI responses </a:t>
-            </a:r>
-          </a:p>
-          <a:p>
-            <a:pPr lvl="1"/>
-            <a:r>
-              <a:rPr lang="en-US" dirty="0"/>
-              <a:t>👉Switching to human-only mode when needed </a:t>
-            </a:r>
-          </a:p>
-          <a:p>
-            <a:pPr lvl="1"/>
-            <a:r>
-              <a:rPr lang="en-US" dirty="0"/>
-              <a:t>👉And notifications for both therapists and users </a:t>
-            </a:r>
-          </a:p>
-          <a:p>
-            <a:r>
-              <a:rPr lang="en-US" dirty="0"/>
               <a:t>So the key point is:</a:t>
             </a:r>
           </a:p>
@@ -3791,234 +3520,148 @@
           <a:p>
             <a:r>
               <a:rPr lang="en-US" dirty="0"/>
-              <a:t>Another important part of </a:t>
-            </a:r>
-            <a:r>
-              <a:rPr lang="en-US" dirty="0" err="1"/>
+              <a:t>Another feature I’d like to show you is our </a:t>
+            </a:r>
+            <a:r>
+              <a:rPr lang="en-US" b="1" dirty="0"/>
+              <a:t>mobile application </a:t>
+            </a:r>
+            <a:r>
+              <a:rPr lang="en-US" dirty="0"/>
+              <a:t>— and why it really matters.</a:t>
+            </a:r>
+          </a:p>
+          <a:p>
+            <a:endParaRPr lang="en-US" dirty="0"/>
+          </a:p>
+          <a:p>
+            <a:r>
+              <a:rPr lang="en-US" dirty="0"/>
+              <a:t>Many studies are simply </a:t>
+            </a:r>
+            <a:r>
+              <a:rPr lang="en-US" b="1" dirty="0"/>
+              <a:t>not well suited for a website or desktop</a:t>
+            </a:r>
+            <a:r>
+              <a:rPr lang="en-US" dirty="0"/>
+              <a:t> use only. We want to reach people who are </a:t>
+            </a:r>
+            <a:r>
+              <a:rPr lang="en-US" b="1" dirty="0"/>
+              <a:t>not sitting in front of a computer </a:t>
+            </a:r>
+            <a:r>
+              <a:rPr lang="en-US" dirty="0"/>
+              <a:t>all day. These users often </a:t>
+            </a:r>
+            <a:r>
+              <a:rPr lang="en-US" b="1" dirty="0"/>
+              <a:t>have busy lives</a:t>
+            </a:r>
+            <a:r>
+              <a:rPr lang="en-US" dirty="0"/>
+              <a:t>, and that’s exactly where mobile apps become very valuable.</a:t>
+            </a:r>
+          </a:p>
+          <a:p>
+            <a:endParaRPr lang="en-US" dirty="0"/>
+          </a:p>
+          <a:p>
+            <a:r>
+              <a:rPr lang="en-US" dirty="0"/>
+              <a:t>With mobile, we can use </a:t>
+            </a:r>
+            <a:r>
+              <a:rPr lang="en-US" b="1" dirty="0"/>
+              <a:t>push notifications</a:t>
+            </a:r>
+            <a:r>
+              <a:rPr lang="en-US" dirty="0"/>
+              <a:t> and native device features </a:t>
+            </a:r>
+            <a:r>
+              <a:rPr lang="en-US" b="1" dirty="0"/>
+              <a:t>to reach users </a:t>
+            </a:r>
+            <a:r>
+              <a:rPr lang="en-US" dirty="0"/>
+              <a:t>at the right moment. It gives them </a:t>
+            </a:r>
+            <a:r>
+              <a:rPr lang="en-US" b="1" dirty="0"/>
+              <a:t>quick and easy access to enter data </a:t>
+            </a:r>
+            <a:r>
+              <a:rPr lang="en-US" dirty="0"/>
+              <a:t>whenever it’s convenient for them.</a:t>
+            </a:r>
+          </a:p>
+          <a:p>
+            <a:endParaRPr lang="en-US" dirty="0"/>
+          </a:p>
+          <a:p>
+            <a:r>
+              <a:rPr lang="en-US" dirty="0"/>
+              <a:t>In the end, this can significantly </a:t>
+            </a:r>
+            <a:r>
+              <a:rPr lang="en-US" b="1" dirty="0"/>
+              <a:t>increase user engagement</a:t>
+            </a:r>
+            <a:r>
+              <a:rPr lang="en-US" dirty="0"/>
+              <a:t>. When users are contacted at the right time, they’re </a:t>
+            </a:r>
+            <a:r>
+              <a:rPr lang="en-US" b="1" dirty="0"/>
+              <a:t>more likely to respond, stay active, and continue using the app</a:t>
+            </a:r>
+            <a:r>
+              <a:rPr lang="en-US" dirty="0"/>
+              <a:t>.</a:t>
+            </a:r>
+          </a:p>
+          <a:p>
+            <a:endParaRPr lang="en-US" dirty="0"/>
+          </a:p>
+          <a:p>
+            <a:r>
+              <a:rPr lang="en-US" dirty="0"/>
+              <a:t>And the best part is: </a:t>
+            </a:r>
+            <a:r>
+              <a:rPr lang="en-US" b="1" dirty="0"/>
+              <a:t>everything can be integrated directly into </a:t>
+            </a:r>
+            <a:r>
+              <a:rPr lang="en-US" b="1" dirty="0" err="1"/>
               <a:t>SelfHelp</a:t>
             </a:r>
             <a:r>
               <a:rPr lang="en-US" dirty="0"/>
-              <a:t> is the </a:t>
-            </a:r>
-            <a:r>
-              <a:rPr lang="en-US" b="1" dirty="0"/>
-              <a:t>mobile application</a:t>
-            </a:r>
-            <a:r>
-              <a:rPr lang="en-US" dirty="0"/>
-              <a:t>.</a:t>
-            </a:r>
-          </a:p>
-          <a:p>
-            <a:pPr algn="l"/>
-            <a:r>
-              <a:rPr lang="en-US" dirty="0"/>
-              <a:t>This is important because </a:t>
-            </a:r>
-            <a:r>
-              <a:rPr lang="en-US" b="1" dirty="0"/>
-              <a:t>many research studies</a:t>
-            </a:r>
-            <a:r>
-              <a:rPr lang="en-US" dirty="0"/>
-              <a:t> don’t work well </a:t>
-            </a:r>
-            <a:r>
-              <a:rPr lang="en-US" b="1" dirty="0"/>
-              <a:t>as purely desktop or web-based solutions</a:t>
-            </a:r>
-            <a:r>
-              <a:rPr lang="en-US" dirty="0"/>
-              <a:t>.</a:t>
-            </a:r>
-            <a:br>
-              <a:rPr lang="en-US" dirty="0"/>
-            </a:br>
-            <a:r>
-              <a:rPr lang="en-US" dirty="0"/>
-              <a:t>That creates </a:t>
-            </a:r>
-            <a:r>
-              <a:rPr lang="en-US" b="1" dirty="0"/>
-              <a:t>limitations</a:t>
-            </a:r>
-            <a:r>
-              <a:rPr lang="en-US" dirty="0"/>
-              <a:t>—especially when we want to </a:t>
-            </a:r>
-            <a:r>
-              <a:rPr lang="en-US" b="1" dirty="0"/>
-              <a:t>reach people in their everyday lives</a:t>
-            </a:r>
-            <a:r>
-              <a:rPr lang="en-US" dirty="0"/>
-              <a:t>.</a:t>
-            </a:r>
-          </a:p>
-          <a:p>
-            <a:r>
-              <a:rPr lang="en-US" dirty="0"/>
-              <a:t>In many cases, we’re </a:t>
-            </a:r>
-            <a:r>
-              <a:rPr lang="en-US" b="1" dirty="0"/>
-              <a:t>targeting users with busy lifestyles</a:t>
-            </a:r>
-            <a:r>
-              <a:rPr lang="en-US" dirty="0"/>
-              <a:t>—people who are </a:t>
-            </a:r>
-            <a:r>
-              <a:rPr lang="en-US" b="1" dirty="0"/>
-              <a:t>not sitting in front of a computer</a:t>
-            </a:r>
-            <a:r>
-              <a:rPr lang="en-US" dirty="0"/>
-              <a:t> all day.</a:t>
-            </a:r>
-          </a:p>
-          <a:p>
-            <a:r>
-              <a:rPr lang="en-US" dirty="0"/>
-              <a:t>And this is where </a:t>
-            </a:r>
-            <a:r>
-              <a:rPr lang="en-US" b="1" dirty="0"/>
-              <a:t>the mobile app comes in.</a:t>
-            </a:r>
-          </a:p>
-          <a:p>
-            <a:r>
-              <a:rPr lang="en-US" dirty="0"/>
-              <a:t>It allows us to bring the same program </a:t>
-            </a:r>
-            <a:r>
-              <a:rPr lang="en-US" b="1" dirty="0"/>
-              <a:t>directly onto the phone.</a:t>
-            </a:r>
-            <a:br>
-              <a:rPr lang="en-US" dirty="0"/>
-            </a:br>
-            <a:r>
-              <a:rPr lang="en-US" dirty="0"/>
-              <a:t>Everything designed on the web is </a:t>
-            </a:r>
-            <a:r>
-              <a:rPr lang="en-US" b="1" dirty="0"/>
-              <a:t>also available in a native mobile </a:t>
-            </a:r>
-            <a:r>
-              <a:rPr lang="en-US" dirty="0"/>
-              <a:t>application.</a:t>
-            </a:r>
-          </a:p>
-          <a:p>
-            <a:r>
-              <a:rPr lang="en-US" dirty="0"/>
-              <a:t>On top of that, we can use mobile-specific features—like </a:t>
-            </a:r>
-            <a:r>
-              <a:rPr lang="en-US" b="1" dirty="0"/>
-              <a:t>push notifications</a:t>
-            </a:r>
-            <a:r>
-              <a:rPr lang="en-US" dirty="0"/>
-              <a:t>.</a:t>
-            </a:r>
-          </a:p>
-          <a:p>
-            <a:r>
-              <a:rPr lang="en-US" dirty="0"/>
-              <a:t>This makes the system </a:t>
-            </a:r>
-            <a:r>
-              <a:rPr lang="en-US" b="1" dirty="0"/>
-              <a:t>much more present in everyday life.</a:t>
-            </a:r>
-          </a:p>
-          <a:p>
-            <a:r>
-              <a:rPr lang="en-US" dirty="0"/>
-              <a:t>It’s no longer something users open </a:t>
-            </a:r>
-            <a:r>
-              <a:rPr lang="en-US" b="1" dirty="0"/>
-              <a:t>occasionally on a website</a:t>
-            </a:r>
-            <a:r>
-              <a:rPr lang="en-US" dirty="0"/>
-              <a:t>— it becomes </a:t>
-            </a:r>
-            <a:r>
-              <a:rPr lang="en-US" b="1" dirty="0"/>
-              <a:t>part of an ongoing process.</a:t>
-            </a:r>
-          </a:p>
-          <a:p>
-            <a:r>
-              <a:rPr lang="en-US" dirty="0"/>
-              <a:t>And this has a </a:t>
-            </a:r>
-            <a:r>
-              <a:rPr lang="en-US" b="1" dirty="0"/>
-              <a:t>clear impact.</a:t>
-            </a:r>
-          </a:p>
-          <a:p>
-            <a:r>
-              <a:rPr lang="en-US" b="1" dirty="0"/>
-              <a:t>Mobile access</a:t>
-            </a:r>
-            <a:r>
-              <a:rPr lang="en-US" dirty="0"/>
-              <a:t>, especially </a:t>
-            </a:r>
-            <a:r>
-              <a:rPr lang="en-US" b="1" dirty="0"/>
-              <a:t>combined with push notifications</a:t>
-            </a:r>
-            <a:r>
-              <a:rPr lang="en-US" dirty="0"/>
-              <a:t>, significantly </a:t>
-            </a:r>
-            <a:r>
-              <a:rPr lang="en-US" b="1" dirty="0"/>
-              <a:t>increases engagement.</a:t>
-            </a:r>
-            <a:br>
-              <a:rPr lang="en-US" b="1" dirty="0"/>
-            </a:br>
-            <a:r>
-              <a:rPr lang="en-US" dirty="0"/>
-              <a:t>When users are </a:t>
-            </a:r>
-            <a:r>
-              <a:rPr lang="en-US" b="1" dirty="0"/>
-              <a:t>reminded at the right moment </a:t>
-            </a:r>
-            <a:r>
-              <a:rPr lang="en-US" dirty="0"/>
-              <a:t>and </a:t>
-            </a:r>
-            <a:r>
-              <a:rPr lang="en-US" b="1" dirty="0"/>
-              <a:t>can respond immediately</a:t>
-            </a:r>
-            <a:r>
-              <a:rPr lang="en-US" dirty="0"/>
-              <a:t>,</a:t>
-            </a:r>
-            <a:br>
-              <a:rPr lang="en-US" dirty="0"/>
-            </a:br>
-            <a:r>
-              <a:rPr lang="en-US" dirty="0"/>
-              <a:t>they are much more likely to </a:t>
-            </a:r>
-            <a:r>
-              <a:rPr lang="en-US" b="1" dirty="0"/>
-              <a:t>stay active and continue using the program.</a:t>
+              <a:t>. All the functionalities you’ve already created can </a:t>
+            </a:r>
+            <a:r>
+              <a:rPr lang="en-US" b="1" dirty="0"/>
+              <a:t>be seamlessly rendered</a:t>
+            </a:r>
+            <a:r>
+              <a:rPr lang="en-US" dirty="0"/>
+              <a:t> inside the native mobile app.</a:t>
+            </a:r>
+          </a:p>
+          <a:p>
+            <a:endParaRPr lang="en-US"/>
+          </a:p>
+          <a:p>
+            <a:r>
+              <a:rPr lang="en-US"/>
+              <a:t>That’s </a:t>
+            </a:r>
+            <a:r>
+              <a:rPr lang="en-US" dirty="0"/>
+              <a:t>where the real value comes in.</a:t>
             </a:r>
           </a:p>
         </p:txBody>
@@ -4208,7 +3851,7 @@
           <a:p>
             <a:fld id="{E8CA5CE0-F7C1-476F-AF9B-2B5B68296F02}" type="datetimeFigureOut">
               <a:rPr lang="LID4096" smtClean="0"/>
-              <a:t>03/28/2026</a:t>
+              <a:t>03/30/2026</a:t>
             </a:fld>
             <a:endParaRPr lang="LID4096"/>
           </a:p>
@@ -4408,7 +4051,7 @@
           <a:p>
             <a:fld id="{E8CA5CE0-F7C1-476F-AF9B-2B5B68296F02}" type="datetimeFigureOut">
               <a:rPr lang="LID4096" smtClean="0"/>
-              <a:t>03/28/2026</a:t>
+              <a:t>03/30/2026</a:t>
             </a:fld>
             <a:endParaRPr lang="LID4096"/>
           </a:p>
@@ -4618,7 +4261,7 @@
           <a:p>
             <a:fld id="{E8CA5CE0-F7C1-476F-AF9B-2B5B68296F02}" type="datetimeFigureOut">
               <a:rPr lang="LID4096" smtClean="0"/>
-              <a:t>03/28/2026</a:t>
+              <a:t>03/30/2026</a:t>
             </a:fld>
             <a:endParaRPr lang="LID4096"/>
           </a:p>
@@ -4818,7 +4461,7 @@
           <a:p>
             <a:fld id="{E8CA5CE0-F7C1-476F-AF9B-2B5B68296F02}" type="datetimeFigureOut">
               <a:rPr lang="LID4096" smtClean="0"/>
-              <a:t>03/28/2026</a:t>
+              <a:t>03/30/2026</a:t>
             </a:fld>
             <a:endParaRPr lang="LID4096"/>
           </a:p>
@@ -5094,7 +4737,7 @@
           <a:p>
             <a:fld id="{E8CA5CE0-F7C1-476F-AF9B-2B5B68296F02}" type="datetimeFigureOut">
               <a:rPr lang="LID4096" smtClean="0"/>
-              <a:t>03/28/2026</a:t>
+              <a:t>03/30/2026</a:t>
             </a:fld>
             <a:endParaRPr lang="LID4096"/>
           </a:p>
@@ -5362,7 +5005,7 @@
           <a:p>
             <a:fld id="{E8CA5CE0-F7C1-476F-AF9B-2B5B68296F02}" type="datetimeFigureOut">
               <a:rPr lang="LID4096" smtClean="0"/>
-              <a:t>03/28/2026</a:t>
+              <a:t>03/30/2026</a:t>
             </a:fld>
             <a:endParaRPr lang="LID4096"/>
           </a:p>
@@ -5777,7 +5420,7 @@
           <a:p>
             <a:fld id="{E8CA5CE0-F7C1-476F-AF9B-2B5B68296F02}" type="datetimeFigureOut">
               <a:rPr lang="LID4096" smtClean="0"/>
-              <a:t>03/28/2026</a:t>
+              <a:t>03/30/2026</a:t>
             </a:fld>
             <a:endParaRPr lang="LID4096"/>
           </a:p>
@@ -5919,7 +5562,7 @@
           <a:p>
             <a:fld id="{E8CA5CE0-F7C1-476F-AF9B-2B5B68296F02}" type="datetimeFigureOut">
               <a:rPr lang="LID4096" smtClean="0"/>
-              <a:t>03/28/2026</a:t>
+              <a:t>03/30/2026</a:t>
             </a:fld>
             <a:endParaRPr lang="LID4096"/>
           </a:p>
@@ -6032,7 +5675,7 @@
           <a:p>
             <a:fld id="{E8CA5CE0-F7C1-476F-AF9B-2B5B68296F02}" type="datetimeFigureOut">
               <a:rPr lang="LID4096" smtClean="0"/>
-              <a:t>03/28/2026</a:t>
+              <a:t>03/30/2026</a:t>
             </a:fld>
             <a:endParaRPr lang="LID4096"/>
           </a:p>
@@ -6345,7 +5988,7 @@
           <a:p>
             <a:fld id="{E8CA5CE0-F7C1-476F-AF9B-2B5B68296F02}" type="datetimeFigureOut">
               <a:rPr lang="LID4096" smtClean="0"/>
-              <a:t>03/28/2026</a:t>
+              <a:t>03/30/2026</a:t>
             </a:fld>
             <a:endParaRPr lang="LID4096"/>
           </a:p>
@@ -6634,7 +6277,7 @@
           <a:p>
             <a:fld id="{E8CA5CE0-F7C1-476F-AF9B-2B5B68296F02}" type="datetimeFigureOut">
               <a:rPr lang="LID4096" smtClean="0"/>
-              <a:t>03/28/2026</a:t>
+              <a:t>03/30/2026</a:t>
             </a:fld>
             <a:endParaRPr lang="LID4096"/>
           </a:p>
@@ -6877,7 +6520,7 @@
           <a:p>
             <a:fld id="{E8CA5CE0-F7C1-476F-AF9B-2B5B68296F02}" type="datetimeFigureOut">
               <a:rPr lang="LID4096" smtClean="0"/>
-              <a:t>03/28/2026</a:t>
+              <a:t>03/30/2026</a:t>
             </a:fld>
             <a:endParaRPr lang="LID4096"/>
           </a:p>

--- a/SelfHelp-2026-latest.pptx
+++ b/SelfHelp-2026-latest.pptx
@@ -5,21 +5,20 @@
     <p:sldMasterId id="2147483648" r:id="rId1"/>
   </p:sldMasterIdLst>
   <p:notesMasterIdLst>
-    <p:notesMasterId r:id="rId14"/>
+    <p:notesMasterId r:id="rId13"/>
   </p:notesMasterIdLst>
   <p:sldIdLst>
     <p:sldId id="256" r:id="rId2"/>
     <p:sldId id="257" r:id="rId3"/>
-    <p:sldId id="258" r:id="rId4"/>
-    <p:sldId id="259" r:id="rId5"/>
-    <p:sldId id="260" r:id="rId6"/>
-    <p:sldId id="261" r:id="rId7"/>
-    <p:sldId id="262" r:id="rId8"/>
-    <p:sldId id="263" r:id="rId9"/>
-    <p:sldId id="264" r:id="rId10"/>
-    <p:sldId id="265" r:id="rId11"/>
-    <p:sldId id="266" r:id="rId12"/>
-    <p:sldId id="267" r:id="rId13"/>
+    <p:sldId id="260" r:id="rId4"/>
+    <p:sldId id="261" r:id="rId5"/>
+    <p:sldId id="262" r:id="rId6"/>
+    <p:sldId id="268" r:id="rId7"/>
+    <p:sldId id="263" r:id="rId8"/>
+    <p:sldId id="269" r:id="rId9"/>
+    <p:sldId id="265" r:id="rId10"/>
+    <p:sldId id="266" r:id="rId11"/>
+    <p:sldId id="267" r:id="rId12"/>
   </p:sldIdLst>
   <p:sldSz cx="12192000" cy="6858000"/>
   <p:notesSz cx="6858000" cy="9144000"/>
@@ -641,7 +640,7 @@
           <a:p>
             <a:r>
               <a:rPr lang="en-US" dirty="0"/>
-              <a:t>If we compare </a:t>
+              <a:t>So, why use </a:t>
             </a:r>
             <a:r>
               <a:rPr lang="en-US" b="1" dirty="0" err="1"/>
@@ -649,124 +648,189 @@
             </a:r>
             <a:r>
               <a:rPr lang="en-US" dirty="0"/>
-              <a:t> to other systems, it’s important to be fair.</a:t>
-            </a:r>
-          </a:p>
-          <a:p>
-            <a:r>
-              <a:rPr lang="en-US" dirty="0"/>
-              <a:t>There are several strong open-source tools, such as </a:t>
-            </a:r>
-            <a:r>
-              <a:rPr lang="en-US" dirty="0" err="1"/>
-              <a:t>LimeSurvey</a:t>
-            </a:r>
-            <a:r>
-              <a:rPr lang="en-US" dirty="0"/>
-              <a:t>, JATOS, </a:t>
-            </a:r>
-            <a:r>
-              <a:rPr lang="en-US" dirty="0" err="1"/>
-              <a:t>formr</a:t>
-            </a:r>
-            <a:r>
-              <a:rPr lang="en-US" dirty="0"/>
-              <a:t>, or Moodle.</a:t>
-            </a:r>
-          </a:p>
-          <a:p>
-            <a:r>
-              <a:rPr lang="en-US" dirty="0"/>
-              <a:t>Each of these systems is excellent in its own area:</a:t>
-            </a:r>
-          </a:p>
-          <a:p>
-            <a:pPr lvl="1"/>
-            <a:r>
-              <a:rPr lang="en-US" dirty="0"/>
-              <a:t>👉JATOS and </a:t>
-            </a:r>
-            <a:r>
-              <a:rPr lang="en-US" dirty="0" err="1"/>
-              <a:t>formr</a:t>
-            </a:r>
-            <a:r>
-              <a:rPr lang="en-US" dirty="0"/>
-              <a:t> are very strong for online studies </a:t>
-            </a:r>
-          </a:p>
-          <a:p>
-            <a:pPr lvl="1"/>
-            <a:r>
-              <a:rPr lang="en-US" dirty="0"/>
-              <a:t>👉</a:t>
-            </a:r>
-            <a:r>
-              <a:rPr lang="en-US" dirty="0" err="1"/>
-              <a:t>LimeSurvey</a:t>
-            </a:r>
-            <a:r>
-              <a:rPr lang="en-US" dirty="0"/>
-              <a:t> is specialized in surveys </a:t>
-            </a:r>
-          </a:p>
-          <a:p>
-            <a:pPr lvl="1"/>
-            <a:r>
-              <a:rPr lang="en-US" dirty="0"/>
-              <a:t>👉Moodle is designed for learning environments </a:t>
-            </a:r>
-          </a:p>
-          <a:p>
-            <a:r>
-              <a:rPr lang="en-US" dirty="0"/>
-              <a:t>What makes </a:t>
+              <a:t>?</a:t>
+            </a:r>
+          </a:p>
+          <a:p>
+            <a:endParaRPr lang="en-US" dirty="0"/>
+          </a:p>
+          <a:p>
+            <a:r>
+              <a:rPr lang="en-US" dirty="0"/>
+              <a:t>The biggest reason is </a:t>
+            </a:r>
+            <a:r>
+              <a:rPr lang="en-US" b="1" dirty="0"/>
+              <a:t>integration</a:t>
+            </a:r>
+            <a:r>
+              <a:rPr lang="en-US" dirty="0"/>
+              <a:t>.</a:t>
+            </a:r>
+          </a:p>
+          <a:p>
+            <a:endParaRPr lang="en-US" dirty="0"/>
+          </a:p>
+          <a:p>
+            <a:r>
+              <a:rPr lang="en-US" dirty="0"/>
+              <a:t>Instead of </a:t>
+            </a:r>
+            <a:r>
+              <a:rPr lang="en-US" b="1" dirty="0"/>
+              <a:t>splitting your work </a:t>
+            </a:r>
+            <a:r>
+              <a:rPr lang="en-US" dirty="0"/>
+              <a:t>across multiple tools, everything is combined in </a:t>
+            </a:r>
+            <a:r>
+              <a:rPr lang="en-US" b="1" dirty="0"/>
+              <a:t>a single platform </a:t>
+            </a:r>
+            <a:r>
+              <a:rPr lang="en-US" b="0" dirty="0"/>
+              <a:t>which can be installed locally in the University.</a:t>
+            </a:r>
+          </a:p>
+          <a:p>
+            <a:endParaRPr lang="en-US" b="0" dirty="0"/>
+          </a:p>
+          <a:p>
+            <a:r>
+              <a:rPr lang="en-US" dirty="0"/>
+              <a:t>As we have seen, the platform is evolving, we’re continuously improving and maintaining it.</a:t>
+            </a:r>
+          </a:p>
+          <a:p>
+            <a:endParaRPr lang="en-US" dirty="0"/>
+          </a:p>
+          <a:p>
+            <a:r>
+              <a:rPr lang="en-US" dirty="0"/>
+              <a:t>We are also developing </a:t>
             </a:r>
             <a:r>
               <a:rPr lang="en-US" b="1" dirty="0" err="1"/>
               <a:t>SelfHelp</a:t>
             </a:r>
             <a:r>
-              <a:rPr lang="en-US" dirty="0"/>
-              <a:t> different is not that it replaces these tools.</a:t>
-            </a:r>
-          </a:p>
-          <a:p>
-            <a:r>
-              <a:rPr lang="en-US" dirty="0"/>
-              <a:t>The real strength lies in the </a:t>
-            </a:r>
-            <a:r>
               <a:rPr lang="en-US" b="1" dirty="0"/>
-              <a:t>connection between all components bringing them all within a single platform.</a:t>
-            </a:r>
-          </a:p>
-          <a:p>
-            <a:r>
-              <a:rPr lang="en-US" dirty="0"/>
-              <a:t>So if someone </a:t>
+              <a:t> 2</a:t>
+            </a:r>
+            <a:r>
+              <a:rPr lang="en-US" dirty="0"/>
+              <a:t>, a completely redesigned version </a:t>
             </a:r>
             <a:r>
               <a:rPr lang="en-US" b="1" dirty="0"/>
-              <a:t>only needs one specific function</a:t>
-            </a:r>
-            <a:r>
-              <a:rPr lang="en-US" dirty="0"/>
-              <a:t>, a specialized tool might be the better choice.</a:t>
-            </a:r>
-          </a:p>
-          <a:p>
-            <a:r>
-              <a:rPr lang="en-US" dirty="0"/>
-              <a:t>But if someone is looking for an integrated, </a:t>
+              <a:t>with the goal of making it simpler to use</a:t>
+            </a:r>
+            <a:r>
+              <a:rPr lang="en-US" dirty="0"/>
+              <a:t>.</a:t>
+            </a:r>
+          </a:p>
+          <a:p>
+            <a:endParaRPr lang="en-US" dirty="0"/>
+          </a:p>
+          <a:p>
+            <a:r>
+              <a:rPr lang="en-US" dirty="0"/>
+              <a:t>One particularly promising feature is </a:t>
             </a:r>
             <a:r>
               <a:rPr lang="en-US" b="1" dirty="0"/>
-              <a:t>end-to-end solution</a:t>
-            </a:r>
-            <a:r>
-              <a:rPr lang="en-US" dirty="0"/>
-              <a:t>, then </a:t>
+              <a:t>AI-supported content creation</a:t>
+            </a:r>
+            <a:r>
+              <a:rPr lang="en-US" dirty="0"/>
+              <a:t>.</a:t>
+            </a:r>
+          </a:p>
+          <a:p>
+            <a:endParaRPr lang="en-US" dirty="0"/>
+          </a:p>
+          <a:p>
+            <a:r>
+              <a:rPr lang="en-US" dirty="0"/>
+              <a:t>This will </a:t>
+            </a:r>
+            <a:r>
+              <a:rPr lang="en-US" b="1" dirty="0"/>
+              <a:t>allow teams to create content </a:t>
+            </a:r>
+            <a:r>
+              <a:rPr lang="en-US" dirty="0"/>
+              <a:t>for web and mobile much faster.</a:t>
+            </a:r>
+          </a:p>
+          <a:p>
+            <a:br>
+              <a:rPr lang="en-US" dirty="0"/>
+            </a:br>
+            <a:r>
+              <a:rPr lang="en-US" dirty="0"/>
+              <a:t>And the </a:t>
+            </a:r>
+            <a:r>
+              <a:rPr lang="en-US" b="1" dirty="0"/>
+              <a:t>time saved</a:t>
+            </a:r>
+            <a:r>
+              <a:rPr lang="en-US" dirty="0"/>
+              <a:t> </a:t>
+            </a:r>
+            <a:r>
+              <a:rPr lang="en-US" b="1" dirty="0"/>
+              <a:t>can be reinvested </a:t>
+            </a:r>
+            <a:r>
+              <a:rPr lang="en-US" dirty="0"/>
+              <a:t>into what really matters for you as researchers:</a:t>
+            </a:r>
+          </a:p>
+          <a:p>
+            <a:pPr lvl="1"/>
+            <a:r>
+              <a:rPr lang="en-US" dirty="0"/>
+              <a:t>👉</a:t>
+            </a:r>
+            <a:r>
+              <a:rPr lang="en-US" b="0" dirty="0"/>
+              <a:t>Improving study quality </a:t>
+            </a:r>
+          </a:p>
+          <a:p>
+            <a:pPr lvl="1"/>
+            <a:r>
+              <a:rPr lang="en-US" dirty="0"/>
+              <a:t>👉And refining study design</a:t>
+            </a:r>
+          </a:p>
+          <a:p>
+            <a:pPr lvl="1"/>
+            <a:endParaRPr lang="en-US" dirty="0"/>
+          </a:p>
+          <a:p>
+            <a:r>
+              <a:rPr lang="en-US" dirty="0"/>
+              <a:t>So the </a:t>
+            </a:r>
+            <a:r>
+              <a:rPr lang="en-US" b="1" dirty="0"/>
+              <a:t>key message </a:t>
+            </a:r>
+            <a:r>
+              <a:rPr lang="en-US" dirty="0"/>
+              <a:t>is:</a:t>
+            </a:r>
+          </a:p>
+          <a:p>
+            <a:pPr lvl="1"/>
+            <a:r>
+              <a:rPr lang="en-US" dirty="0"/>
+              <a:t>👉 </a:t>
             </a:r>
             <a:r>
               <a:rPr lang="en-US" dirty="0" err="1"/>
@@ -774,11 +838,22 @@
             </a:r>
             <a:r>
               <a:rPr lang="en-US" dirty="0"/>
-              <a:t> really </a:t>
+              <a:t> moves us away from </a:t>
             </a:r>
             <a:r>
               <a:rPr lang="en-US" b="1" dirty="0"/>
-              <a:t>stand outs.</a:t>
+              <a:t>isolated digital tools</a:t>
+            </a:r>
+            <a:br>
+              <a:rPr lang="en-US" dirty="0"/>
+            </a:br>
+            <a:r>
+              <a:rPr lang="en-US" dirty="0"/>
+              <a:t>👉 toward a </a:t>
+            </a:r>
+            <a:r>
+              <a:rPr lang="en-US" b="1" dirty="0"/>
+              <a:t>single, integrated platform for research.</a:t>
             </a:r>
           </a:p>
           <a:p>
@@ -812,7 +887,7 @@
     </p:spTree>
     <p:extLst>
       <p:ext uri="{BB962C8B-B14F-4D97-AF65-F5344CB8AC3E}">
-        <p14:creationId xmlns:p14="http://schemas.microsoft.com/office/powerpoint/2010/main" val="4003261056"/>
+        <p14:creationId xmlns:p14="http://schemas.microsoft.com/office/powerpoint/2010/main" val="538829018"/>
       </p:ext>
     </p:extLst>
   </p:cSld>
@@ -868,288 +943,6 @@
           <a:p>
             <a:r>
               <a:rPr lang="en-US" dirty="0"/>
-              <a:t>So, why use </a:t>
-            </a:r>
-            <a:r>
-              <a:rPr lang="en-US" b="1" dirty="0" err="1"/>
-              <a:t>SelfHelp</a:t>
-            </a:r>
-            <a:r>
-              <a:rPr lang="en-US" dirty="0"/>
-              <a:t>?</a:t>
-            </a:r>
-          </a:p>
-          <a:p>
-            <a:r>
-              <a:rPr lang="en-US" dirty="0"/>
-              <a:t>The biggest reason is </a:t>
-            </a:r>
-            <a:r>
-              <a:rPr lang="en-US" b="1" dirty="0"/>
-              <a:t>integration</a:t>
-            </a:r>
-            <a:r>
-              <a:rPr lang="en-US" dirty="0"/>
-              <a:t>.</a:t>
-            </a:r>
-          </a:p>
-          <a:p>
-            <a:r>
-              <a:rPr lang="en-US" dirty="0"/>
-              <a:t>Instead of </a:t>
-            </a:r>
-            <a:r>
-              <a:rPr lang="en-US" b="1" dirty="0"/>
-              <a:t>splitting your work </a:t>
-            </a:r>
-            <a:r>
-              <a:rPr lang="en-US" dirty="0"/>
-              <a:t>across multiple tools, everything is combined in </a:t>
-            </a:r>
-            <a:r>
-              <a:rPr lang="en-US" b="1" dirty="0"/>
-              <a:t>a single platform </a:t>
-            </a:r>
-            <a:r>
-              <a:rPr lang="en-US" b="0" dirty="0"/>
-              <a:t>which can be installed locally in the University.</a:t>
-            </a:r>
-          </a:p>
-          <a:p>
-            <a:r>
-              <a:rPr lang="en-US" dirty="0"/>
-              <a:t>Also as we have seen, the system is continuously developed and supported.</a:t>
-            </a:r>
-          </a:p>
-          <a:p>
-            <a:r>
-              <a:rPr lang="en-US" dirty="0"/>
-              <a:t>We are even developing </a:t>
-            </a:r>
-            <a:r>
-              <a:rPr lang="en-US" b="1" dirty="0" err="1"/>
-              <a:t>SelfHelp</a:t>
-            </a:r>
-            <a:r>
-              <a:rPr lang="en-US" b="1" dirty="0"/>
-              <a:t> 2</a:t>
-            </a:r>
-            <a:r>
-              <a:rPr lang="en-US" dirty="0"/>
-              <a:t>, a completely redesigned platform.</a:t>
-            </a:r>
-            <a:br>
-              <a:rPr lang="en-US" dirty="0"/>
-            </a:br>
-            <a:r>
-              <a:rPr lang="en-US" dirty="0"/>
-              <a:t>It is built to </a:t>
-            </a:r>
-            <a:r>
-              <a:rPr lang="en-US" b="1" dirty="0"/>
-              <a:t>be more structured, easier to extend, and simpler to work with.</a:t>
-            </a:r>
-          </a:p>
-          <a:p>
-            <a:r>
-              <a:rPr lang="en-US" dirty="0"/>
-              <a:t>One particularly promising feature is </a:t>
-            </a:r>
-            <a:r>
-              <a:rPr lang="en-US" b="1" dirty="0"/>
-              <a:t>AI-supported content creation</a:t>
-            </a:r>
-            <a:r>
-              <a:rPr lang="en-US" dirty="0"/>
-              <a:t>.</a:t>
-            </a:r>
-          </a:p>
-          <a:p>
-            <a:r>
-              <a:rPr lang="en-US" dirty="0"/>
-              <a:t>This will </a:t>
-            </a:r>
-            <a:r>
-              <a:rPr lang="en-US" b="1" dirty="0"/>
-              <a:t>allow teams to create content </a:t>
-            </a:r>
-            <a:r>
-              <a:rPr lang="en-US" dirty="0"/>
-              <a:t>for web and mobile much faster.</a:t>
-            </a:r>
-            <a:br>
-              <a:rPr lang="en-US" dirty="0"/>
-            </a:br>
-            <a:r>
-              <a:rPr lang="en-US" dirty="0"/>
-              <a:t>And the </a:t>
-            </a:r>
-            <a:r>
-              <a:rPr lang="en-US" b="1" dirty="0"/>
-              <a:t>time saved</a:t>
-            </a:r>
-            <a:r>
-              <a:rPr lang="en-US" dirty="0"/>
-              <a:t> </a:t>
-            </a:r>
-            <a:r>
-              <a:rPr lang="en-US" b="1" dirty="0"/>
-              <a:t>can be reinvested </a:t>
-            </a:r>
-            <a:r>
-              <a:rPr lang="en-US" dirty="0"/>
-              <a:t>into what really matters:</a:t>
-            </a:r>
-          </a:p>
-          <a:p>
-            <a:pPr lvl="1"/>
-            <a:r>
-              <a:rPr lang="en-US" dirty="0"/>
-              <a:t>👉</a:t>
-            </a:r>
-            <a:r>
-              <a:rPr lang="en-US" b="0" dirty="0"/>
-              <a:t>Improving study quality </a:t>
-            </a:r>
-          </a:p>
-          <a:p>
-            <a:pPr lvl="1"/>
-            <a:r>
-              <a:rPr lang="en-US" dirty="0"/>
-              <a:t>👉And refining study design </a:t>
-            </a:r>
-          </a:p>
-          <a:p>
-            <a:r>
-              <a:rPr lang="en-US" dirty="0"/>
-              <a:t>So the </a:t>
-            </a:r>
-            <a:r>
-              <a:rPr lang="en-US" b="1" dirty="0"/>
-              <a:t>key message </a:t>
-            </a:r>
-            <a:r>
-              <a:rPr lang="en-US" dirty="0"/>
-              <a:t>is:</a:t>
-            </a:r>
-          </a:p>
-          <a:p>
-            <a:pPr lvl="1"/>
-            <a:r>
-              <a:rPr lang="en-US" dirty="0"/>
-              <a:t>👉 </a:t>
-            </a:r>
-            <a:r>
-              <a:rPr lang="en-US" dirty="0" err="1"/>
-              <a:t>SelfHelp</a:t>
-            </a:r>
-            <a:r>
-              <a:rPr lang="en-US" dirty="0"/>
-              <a:t> moves us away from </a:t>
-            </a:r>
-            <a:r>
-              <a:rPr lang="en-US" b="1" dirty="0"/>
-              <a:t>isolated digital tools</a:t>
-            </a:r>
-            <a:br>
-              <a:rPr lang="en-US" dirty="0"/>
-            </a:br>
-            <a:r>
-              <a:rPr lang="en-US" dirty="0"/>
-              <a:t>👉 toward a </a:t>
-            </a:r>
-            <a:r>
-              <a:rPr lang="en-US" b="1" dirty="0"/>
-              <a:t>single, integrated platform for research.</a:t>
-            </a:r>
-          </a:p>
-          <a:p>
-            <a:endParaRPr lang="LID4096" dirty="0"/>
-          </a:p>
-        </p:txBody>
-      </p:sp>
-      <p:sp>
-        <p:nvSpPr>
-          <p:cNvPr id="4" name="Slide Number Placeholder 3"/>
-          <p:cNvSpPr>
-            <a:spLocks noGrp="1"/>
-          </p:cNvSpPr>
-          <p:nvPr>
-            <p:ph type="sldNum" sz="quarter" idx="5"/>
-          </p:nvPr>
-        </p:nvSpPr>
-        <p:spPr/>
-        <p:txBody>
-          <a:bodyPr/>
-          <a:lstStyle/>
-          <a:p>
-            <a:fld id="{D46C3B8C-8082-4473-8897-3B8AB5081CC5}" type="slidenum">
-              <a:rPr lang="LID4096" smtClean="0"/>
-              <a:t>11</a:t>
-            </a:fld>
-            <a:endParaRPr lang="LID4096"/>
-          </a:p>
-        </p:txBody>
-      </p:sp>
-    </p:spTree>
-    <p:extLst>
-      <p:ext uri="{BB962C8B-B14F-4D97-AF65-F5344CB8AC3E}">
-        <p14:creationId xmlns:p14="http://schemas.microsoft.com/office/powerpoint/2010/main" val="538829018"/>
-      </p:ext>
-    </p:extLst>
-  </p:cSld>
-  <p:clrMapOvr>
-    <a:masterClrMapping/>
-  </p:clrMapOvr>
-</p:notes>
-</file>
-
-<file path=ppt/notesSlides/notesSlide12.xml><?xml version="1.0" encoding="utf-8"?>
-<p:notes xmlns:a="http://schemas.openxmlformats.org/drawingml/2006/main" xmlns:r="http://schemas.openxmlformats.org/officeDocument/2006/relationships" xmlns:p="http://schemas.openxmlformats.org/presentationml/2006/main">
-  <p:cSld>
-    <p:spTree>
-      <p:nvGrpSpPr>
-        <p:cNvPr id="1" name=""/>
-        <p:cNvGrpSpPr/>
-        <p:nvPr/>
-      </p:nvGrpSpPr>
-      <p:grpSpPr>
-        <a:xfrm>
-          <a:off x="0" y="0"/>
-          <a:ext cx="0" cy="0"/>
-          <a:chOff x="0" y="0"/>
-          <a:chExt cx="0" cy="0"/>
-        </a:xfrm>
-      </p:grpSpPr>
-      <p:sp>
-        <p:nvSpPr>
-          <p:cNvPr id="2" name="Slide Image Placeholder 1"/>
-          <p:cNvSpPr>
-            <a:spLocks noGrp="1" noRot="1" noChangeAspect="1"/>
-          </p:cNvSpPr>
-          <p:nvPr>
-            <p:ph type="sldImg"/>
-          </p:nvPr>
-        </p:nvSpPr>
-        <p:spPr/>
-      </p:sp>
-      <p:sp>
-        <p:nvSpPr>
-          <p:cNvPr id="3" name="Notes Placeholder 2"/>
-          <p:cNvSpPr>
-            <a:spLocks noGrp="1"/>
-          </p:cNvSpPr>
-          <p:nvPr>
-            <p:ph type="body" idx="1"/>
-          </p:nvPr>
-        </p:nvSpPr>
-        <p:spPr/>
-        <p:txBody>
-          <a:bodyPr/>
-          <a:lstStyle/>
-          <a:p>
-            <a:r>
-              <a:rPr lang="en-US" dirty="0"/>
               <a:t>Last but not least, I would like to thank </a:t>
             </a:r>
             <a:r>
@@ -1281,7 +1074,7 @@
           <a:p>
             <a:fld id="{D46C3B8C-8082-4473-8897-3B8AB5081CC5}" type="slidenum">
               <a:rPr lang="LID4096" smtClean="0"/>
-              <a:t>12</a:t>
+              <a:t>11</a:t>
             </a:fld>
             <a:endParaRPr lang="LID4096"/>
           </a:p>
@@ -1362,6 +1155,8 @@
               <a:rPr lang="en-US" dirty="0"/>
               <a:t>If you ask me to describe it with one sentence, I will say:</a:t>
             </a:r>
+          </a:p>
+          <a:p>
             <a:br>
               <a:rPr lang="en-US" dirty="0"/>
             </a:br>
@@ -1387,9 +1182,12 @@
             </a:r>
           </a:p>
           <a:p>
-            <a:r>
-              <a:rPr lang="en-US" dirty="0"/>
-              <a:t>In many projects, systems are fragmented:</a:t>
+            <a:endParaRPr lang="en-US" dirty="0"/>
+          </a:p>
+          <a:p>
+            <a:r>
+              <a:rPr lang="en-US" dirty="0"/>
+              <a:t>In many research projects or online interventions, systems are fragmented:</a:t>
             </a:r>
           </a:p>
           <a:p>
@@ -1438,17 +1236,6 @@
             </a:r>
           </a:p>
           <a:p>
-            <a:pPr lvl="1"/>
-            <a:r>
-              <a:rPr lang="en-US" dirty="0">
-                <a:highlight>
-                  <a:srgbClr val="FFFF00"/>
-                </a:highlight>
-              </a:rPr>
-              <a:t>👉And mobile applications are handled separately </a:t>
-            </a:r>
-          </a:p>
-          <a:p>
             <a:r>
               <a:rPr lang="en-US" dirty="0"/>
               <a:t>As a result, everything </a:t>
@@ -1463,6 +1250,9 @@
             </a:r>
           </a:p>
           <a:p>
+            <a:endParaRPr lang="en-US" dirty="0"/>
+          </a:p>
+          <a:p>
             <a:r>
               <a:rPr lang="en-US" dirty="0" err="1"/>
               <a:t>SelfHelp</a:t>
@@ -1518,7 +1308,7 @@
             <a:pPr lvl="1"/>
             <a:r>
               <a:rPr lang="en-US" dirty="0"/>
-              <a:t>👉And mobile usage </a:t>
+              <a:t>👉And even native mobile application</a:t>
             </a:r>
           </a:p>
           <a:p>
@@ -1536,6 +1326,9 @@
             </a:r>
           </a:p>
           <a:p>
+            <a:endParaRPr lang="en-US" dirty="0"/>
+          </a:p>
+          <a:p>
             <a:r>
               <a:rPr lang="en-US" dirty="0"/>
               <a:t>Another important aspect is that the system can be installed </a:t>
@@ -1553,7 +1346,7 @@
             </a:br>
             <a:r>
               <a:rPr lang="en-US" dirty="0"/>
-              <a:t>This means </a:t>
+              <a:t>This means that we have </a:t>
             </a:r>
             <a:r>
               <a:rPr lang="en-US" b="1" dirty="0"/>
@@ -1561,8 +1354,30 @@
             </a:r>
             <a:r>
               <a:rPr lang="en-US" dirty="0"/>
-              <a:t>over both the data and the system itself.</a:t>
-            </a:r>
+              <a:t>over the data and the system.</a:t>
+            </a:r>
+          </a:p>
+          <a:p>
+            <a:r>
+              <a:rPr lang="en-US" dirty="0"/>
+              <a:t>In summary: </a:t>
+            </a:r>
+            <a:r>
+              <a:rPr lang="en-US" dirty="0" err="1"/>
+              <a:t>SelfHelp</a:t>
+            </a:r>
+            <a:r>
+              <a:rPr lang="en-US" dirty="0"/>
+              <a:t> supports </a:t>
+            </a:r>
+            <a:r>
+              <a:rPr lang="en-US" b="1" dirty="0"/>
+              <a:t>structured, long-term processes from start to finish</a:t>
+            </a:r>
+            <a:endParaRPr lang="en-US" dirty="0"/>
+          </a:p>
+          <a:p>
+            <a:endParaRPr lang="en-US" dirty="0"/>
           </a:p>
         </p:txBody>
       </p:sp>
@@ -1648,178 +1463,232 @@
           <a:p>
             <a:r>
               <a:rPr lang="en-US" dirty="0"/>
-              <a:t>If we look back to</a:t>
+              <a:t>The platform </a:t>
             </a:r>
             <a:r>
               <a:rPr lang="en-US" b="1" dirty="0"/>
-              <a:t> 2021</a:t>
-            </a:r>
-            <a:r>
-              <a:rPr lang="en-US" dirty="0"/>
-              <a:t>, when I first presented </a:t>
-            </a:r>
+              <a:t>has grown </a:t>
+            </a:r>
+            <a:r>
+              <a:rPr lang="en-US" dirty="0"/>
+              <a:t>a lot over the years.</a:t>
+            </a:r>
+          </a:p>
+          <a:p>
+            <a:endParaRPr lang="en-US" dirty="0"/>
+          </a:p>
+          <a:p>
+            <a:r>
+              <a:rPr lang="en-US" dirty="0"/>
+              <a:t>So it became very important for us to </a:t>
+            </a:r>
+            <a:r>
+              <a:rPr lang="en-US" b="1" dirty="0"/>
+              <a:t>keep it maintainable</a:t>
+            </a:r>
+            <a:r>
+              <a:rPr lang="en-US" dirty="0"/>
+              <a:t>—and also </a:t>
+            </a:r>
+            <a:r>
+              <a:rPr lang="en-US" b="1" dirty="0"/>
+              <a:t>lightweight when deployed on servers</a:t>
+            </a:r>
+            <a:r>
+              <a:rPr lang="en-US" dirty="0"/>
+              <a:t>.</a:t>
+            </a:r>
+          </a:p>
+          <a:p>
+            <a:br>
+              <a:rPr lang="en-US" dirty="0"/>
+            </a:br>
+            <a:r>
+              <a:rPr lang="en-US" b="1" dirty="0"/>
+              <a:t>Not every project </a:t>
+            </a:r>
+            <a:r>
+              <a:rPr lang="en-US" dirty="0"/>
+              <a:t>needs all features.</a:t>
+            </a:r>
+          </a:p>
+          <a:p>
+            <a:endParaRPr lang="en-US" dirty="0"/>
+          </a:p>
+          <a:p>
+            <a:r>
+              <a:rPr lang="en-US" dirty="0"/>
+              <a:t>That’s why we introduced a </a:t>
+            </a:r>
+            <a:r>
+              <a:rPr lang="en-US" b="1" dirty="0"/>
+              <a:t>plugin system</a:t>
+            </a:r>
+            <a:r>
+              <a:rPr lang="en-US" dirty="0"/>
+              <a:t>.</a:t>
+            </a:r>
+          </a:p>
+          <a:p>
+            <a:r>
+              <a:rPr lang="en-US" dirty="0"/>
+              <a:t>The idea is simple:</a:t>
+            </a:r>
+            <a:br>
+              <a:rPr lang="en-US" dirty="0"/>
+            </a:br>
+            <a:r>
+              <a:rPr lang="en-US" dirty="0"/>
+              <a:t>Any functionality that doesn’t belong to the core system is </a:t>
+            </a:r>
+            <a:r>
+              <a:rPr lang="en-US" b="1" dirty="0"/>
+              <a:t>added as a plugin</a:t>
+            </a:r>
+            <a:r>
+              <a:rPr lang="en-US" dirty="0"/>
+              <a:t>.</a:t>
+            </a:r>
+          </a:p>
+          <a:p>
+            <a:r>
+              <a:rPr lang="en-US" dirty="0"/>
+              <a:t>This has </a:t>
+            </a:r>
+            <a:r>
+              <a:rPr lang="en-US" b="1" dirty="0"/>
+              <a:t>two main advantages.</a:t>
+            </a:r>
+          </a:p>
+          <a:p>
+            <a:pPr lvl="1"/>
+            <a:r>
+              <a:rPr lang="en-US" dirty="0"/>
+              <a:t>👉First, from a </a:t>
+            </a:r>
+            <a:r>
+              <a:rPr lang="en-US" b="1" dirty="0"/>
+              <a:t>development perspective</a:t>
+            </a:r>
+            <a:r>
+              <a:rPr lang="en-US" dirty="0"/>
+              <a:t>, it keeps the </a:t>
+            </a:r>
+            <a:r>
+              <a:rPr lang="en-US" b="1" dirty="0"/>
+              <a:t>code cleaner, better organized, and easier to maintain.</a:t>
+            </a:r>
+          </a:p>
+          <a:p>
+            <a:pPr lvl="1"/>
+            <a:r>
+              <a:rPr lang="en-US" dirty="0"/>
+              <a:t>👉Second, from a </a:t>
+            </a:r>
+            <a:r>
+              <a:rPr lang="en-US" b="1" dirty="0"/>
+              <a:t>deployment perspective</a:t>
+            </a:r>
+            <a:r>
+              <a:rPr lang="en-US" dirty="0"/>
+              <a:t>, it keeps the </a:t>
+            </a:r>
+            <a:r>
+              <a:rPr lang="en-US" b="1" dirty="0"/>
+              <a:t>system lightweight</a:t>
+            </a:r>
+            <a:r>
+              <a:rPr lang="en-US" dirty="0"/>
+              <a:t>.</a:t>
+            </a:r>
+          </a:p>
+          <a:p>
+            <a:pPr lvl="0"/>
+            <a:r>
+              <a:rPr lang="en-US" dirty="0"/>
+              <a:t>If a project doesn’t need certain features, they simply don’t have to be installed.</a:t>
+            </a:r>
+          </a:p>
+          <a:p>
+            <a:pPr lvl="0"/>
+            <a:endParaRPr lang="en-US" dirty="0"/>
+          </a:p>
+          <a:p>
+            <a:r>
+              <a:rPr lang="en-US" dirty="0"/>
+              <a:t>We already</a:t>
+            </a:r>
+            <a:r>
+              <a:rPr lang="en-US" b="1" dirty="0"/>
+              <a:t> developed several plugins</a:t>
+            </a:r>
+            <a:r>
+              <a:rPr lang="en-US" dirty="0"/>
+              <a:t>, for example:</a:t>
+            </a:r>
+          </a:p>
+          <a:p>
+            <a:pPr lvl="1"/>
+            <a:r>
+              <a:rPr lang="en-US" dirty="0"/>
+              <a:t>👉External authentication </a:t>
+            </a:r>
+          </a:p>
+          <a:p>
+            <a:pPr lvl="1"/>
+            <a:r>
+              <a:rPr lang="en-US" dirty="0"/>
+              <a:t>👉Lab.js integration </a:t>
+            </a:r>
+          </a:p>
+          <a:p>
+            <a:pPr lvl="1"/>
+            <a:r>
+              <a:rPr lang="en-US" dirty="0"/>
+              <a:t>👉R integration </a:t>
+            </a:r>
+          </a:p>
+          <a:p>
+            <a:pPr lvl="1"/>
+            <a:r>
+              <a:rPr lang="en-US" dirty="0"/>
+              <a:t>👉Custom formulas </a:t>
+            </a:r>
+          </a:p>
+          <a:p>
+            <a:pPr lvl="1"/>
+            <a:r>
+              <a:rPr lang="en-US" dirty="0"/>
+              <a:t>👉API import and export </a:t>
+            </a:r>
+          </a:p>
+          <a:p>
+            <a:pPr lvl="1"/>
+            <a:r>
+              <a:rPr lang="en-US" dirty="0"/>
+              <a:t>👉Plotly.js – library for graphs</a:t>
+            </a:r>
+          </a:p>
+          <a:p>
+            <a:r>
+              <a:rPr lang="en-US" dirty="0"/>
+              <a:t>In the next slides, I’ll focus on </a:t>
+            </a:r>
+            <a:r>
+              <a:rPr lang="en-US" b="1" dirty="0"/>
+              <a:t>three specific plugins:</a:t>
+            </a:r>
+            <a:br>
+              <a:rPr lang="en-US" dirty="0"/>
+            </a:br>
             <a:r>
               <a:rPr lang="en-US" dirty="0" err="1"/>
-              <a:t>SelfHelp</a:t>
-            </a:r>
-            <a:r>
-              <a:rPr lang="en-US" dirty="0"/>
-              <a:t>, it was mostly a </a:t>
-            </a:r>
-            <a:r>
-              <a:rPr lang="en-US" b="1" dirty="0"/>
-              <a:t>website builder</a:t>
-            </a:r>
-            <a:r>
-              <a:rPr lang="en-US" dirty="0"/>
-              <a:t>. The focus was clearly on </a:t>
-            </a:r>
-            <a:r>
-              <a:rPr lang="en-US" b="1" dirty="0"/>
-              <a:t>content and page building</a:t>
-            </a:r>
-            <a:r>
-              <a:rPr lang="en-US" dirty="0"/>
-              <a:t>.</a:t>
-            </a:r>
-          </a:p>
-          <a:p>
-            <a:endParaRPr lang="en-US" dirty="0"/>
-          </a:p>
-          <a:p>
-            <a:r>
-              <a:rPr lang="en-US" dirty="0"/>
-              <a:t>After that, the system slowly became </a:t>
-            </a:r>
-            <a:r>
-              <a:rPr lang="en-US" b="1" dirty="0"/>
-              <a:t>more flexible</a:t>
-            </a:r>
-            <a:r>
-              <a:rPr lang="en-US" dirty="0"/>
-              <a:t>. We added </a:t>
-            </a:r>
-            <a:r>
-              <a:rPr lang="en-US" b="1" dirty="0"/>
-              <a:t>modular pages</a:t>
-            </a:r>
-            <a:r>
-              <a:rPr lang="en-US" dirty="0"/>
-              <a:t>, </a:t>
-            </a:r>
-            <a:r>
-              <a:rPr lang="en-US" b="1" dirty="0"/>
-              <a:t>scheduling</a:t>
-            </a:r>
-            <a:r>
-              <a:rPr lang="en-US" dirty="0"/>
-              <a:t>, and </a:t>
-            </a:r>
-            <a:r>
-              <a:rPr lang="en-US" b="1" dirty="0"/>
-              <a:t>mobile support</a:t>
-            </a:r>
-            <a:r>
-              <a:rPr lang="en-US" dirty="0"/>
-              <a:t>.</a:t>
-            </a:r>
-          </a:p>
-          <a:p>
-            <a:endParaRPr lang="en-US" dirty="0"/>
-          </a:p>
-          <a:p>
-            <a:r>
-              <a:rPr lang="en-US" dirty="0"/>
-              <a:t>Then later, we continued adding </a:t>
-            </a:r>
-            <a:r>
-              <a:rPr lang="en-US" b="1" dirty="0"/>
-              <a:t>new features</a:t>
-            </a:r>
-            <a:r>
-              <a:rPr lang="en-US" dirty="0"/>
-              <a:t>, but also focused on improving </a:t>
-            </a:r>
-            <a:r>
-              <a:rPr lang="en-US" b="1" dirty="0"/>
-              <a:t>how data is managed in the backend</a:t>
-            </a:r>
-            <a:r>
-              <a:rPr lang="en-US" dirty="0"/>
-              <a:t>.</a:t>
-            </a:r>
-            <a:br>
-              <a:rPr lang="en-US" dirty="0"/>
-            </a:br>
-            <a:r>
-              <a:rPr lang="en-US" dirty="0"/>
-              <a:t>Most of these improvements are </a:t>
-            </a:r>
-            <a:r>
-              <a:rPr lang="en-US" b="1" dirty="0"/>
-              <a:t>not directly visible to users</a:t>
-            </a:r>
-            <a:r>
-              <a:rPr lang="en-US" dirty="0"/>
-              <a:t>, but they were essential. They made the system more </a:t>
-            </a:r>
-            <a:r>
-              <a:rPr lang="en-US" b="1" dirty="0"/>
-              <a:t>flexible and easier to extend </a:t>
-            </a:r>
-            <a:r>
-              <a:rPr lang="en-US" dirty="0"/>
-              <a:t>in the future.</a:t>
-            </a:r>
-          </a:p>
-          <a:p>
-            <a:endParaRPr lang="en-US" dirty="0"/>
-          </a:p>
-          <a:p>
-            <a:r>
-              <a:rPr lang="en-US" dirty="0"/>
-              <a:t>Our </a:t>
-            </a:r>
-            <a:r>
-              <a:rPr lang="en-US" b="1" dirty="0"/>
-              <a:t>latest step </a:t>
-            </a:r>
-            <a:r>
-              <a:rPr lang="en-US" dirty="0"/>
-              <a:t>was the integration of </a:t>
-            </a:r>
-            <a:r>
-              <a:rPr lang="en-US" b="1" dirty="0"/>
-              <a:t>AI support</a:t>
-            </a:r>
-            <a:r>
-              <a:rPr lang="en-US" dirty="0"/>
-              <a:t>.</a:t>
-            </a:r>
-            <a:br>
-              <a:rPr lang="en-US" dirty="0"/>
-            </a:br>
-            <a:r>
-              <a:rPr lang="en-US" dirty="0"/>
-              <a:t>However, this is </a:t>
-            </a:r>
-            <a:r>
-              <a:rPr lang="en-US" b="1" dirty="0"/>
-              <a:t>not just a simple chatbot</a:t>
-            </a:r>
-            <a:r>
-              <a:rPr lang="en-US" dirty="0"/>
-              <a:t>. It is implemented in </a:t>
-            </a:r>
-            <a:r>
-              <a:rPr lang="en-US" b="1" dirty="0"/>
-              <a:t>a structured, controlled, and testable way</a:t>
-            </a:r>
-            <a:r>
-              <a:rPr lang="en-US" dirty="0"/>
-              <a:t>—as I will show later.</a:t>
-            </a:r>
-            <a:endParaRPr lang="LID4096" dirty="0"/>
+              <a:t>SurveyJS</a:t>
+            </a:r>
+            <a:r>
+              <a:rPr lang="en-US" dirty="0"/>
+              <a:t>, LLM, and the LLM Therapy Chat.</a:t>
+            </a:r>
           </a:p>
         </p:txBody>
       </p:sp>
@@ -1849,7 +1718,7 @@
     </p:spTree>
     <p:extLst>
       <p:ext uri="{BB962C8B-B14F-4D97-AF65-F5344CB8AC3E}">
-        <p14:creationId xmlns:p14="http://schemas.microsoft.com/office/powerpoint/2010/main" val="2212826204"/>
+        <p14:creationId xmlns:p14="http://schemas.microsoft.com/office/powerpoint/2010/main" val="3374709414"/>
       </p:ext>
     </p:extLst>
   </p:cSld>
@@ -1905,33 +1774,200 @@
           <a:p>
             <a:r>
               <a:rPr lang="en-US" dirty="0"/>
-              <a:t>So</a:t>
-            </a:r>
+              <a:t>The first plugin I want to talk about is </a:t>
+            </a:r>
+            <a:r>
+              <a:rPr lang="en-US" b="1" dirty="0" err="1"/>
+              <a:t>SurveyJS</a:t>
+            </a:r>
+            <a:r>
+              <a:rPr lang="en-US" dirty="0"/>
+              <a:t>.</a:t>
+            </a:r>
+            <a:br>
+              <a:rPr lang="en-US" dirty="0"/>
+            </a:br>
             <a:r>
               <a:rPr lang="en-US" b="1" dirty="0"/>
-              <a:t>, what can you actually do </a:t>
-            </a:r>
-            <a:r>
-              <a:rPr lang="en-US" dirty="0"/>
-              <a:t>with </a:t>
-            </a:r>
-            <a:r>
-              <a:rPr lang="en-US" b="0" dirty="0" err="1"/>
-              <a:t>SelfHelp</a:t>
-            </a:r>
-            <a:r>
-              <a:rPr lang="en-US" dirty="0"/>
-              <a:t>?</a:t>
-            </a:r>
-          </a:p>
-          <a:p>
-            <a:r>
-              <a:rPr lang="en-US" dirty="0"/>
-              <a:t>If you run a study, a course, or any kind of guided digital program, </a:t>
+              <a:t>The idea is very simple</a:t>
+            </a:r>
+            <a:r>
+              <a:rPr lang="en-US" dirty="0"/>
+              <a:t>: we can </a:t>
             </a:r>
             <a:r>
               <a:rPr lang="en-US" b="1" dirty="0"/>
-              <a:t>a single page or form is usually not enough</a:t>
+              <a:t>design and manage surveys </a:t>
+            </a:r>
+            <a:r>
+              <a:rPr lang="en-US" dirty="0"/>
+              <a:t>directly inside our platform.</a:t>
+            </a:r>
+          </a:p>
+          <a:p>
+            <a:r>
+              <a:rPr lang="en-US" dirty="0"/>
+              <a:t>That means </a:t>
+            </a:r>
+            <a:r>
+              <a:rPr lang="en-US" b="1" dirty="0"/>
+              <a:t>we can</a:t>
+            </a:r>
+            <a:r>
+              <a:rPr lang="en-US" dirty="0"/>
+              <a:t>:</a:t>
+            </a:r>
+          </a:p>
+          <a:p>
+            <a:pPr lvl="1"/>
+            <a:r>
+              <a:rPr lang="en-US" dirty="0"/>
+              <a:t>👉Create surveys </a:t>
+            </a:r>
+          </a:p>
+          <a:p>
+            <a:pPr lvl="1"/>
+            <a:r>
+              <a:rPr lang="en-US" dirty="0"/>
+              <a:t>👉Store and version them </a:t>
+            </a:r>
+          </a:p>
+          <a:p>
+            <a:pPr lvl="1"/>
+            <a:r>
+              <a:rPr lang="en-US" dirty="0"/>
+              <a:t>👉And publish them when they’re ready </a:t>
+            </a:r>
+          </a:p>
+          <a:p>
+            <a:r>
+              <a:rPr lang="en-US" dirty="0"/>
+              <a:t>Once published, these surveys can </a:t>
+            </a:r>
+            <a:r>
+              <a:rPr lang="en-US" b="1" dirty="0"/>
+              <a:t>be used directly in the system</a:t>
+            </a:r>
+            <a:r>
+              <a:rPr lang="en-US" dirty="0"/>
+              <a:t>—without relying on external tools.</a:t>
+            </a:r>
+          </a:p>
+          <a:p>
+            <a:r>
+              <a:rPr lang="en-US" dirty="0"/>
+              <a:t>All collected </a:t>
+            </a:r>
+            <a:r>
+              <a:rPr lang="en-US" b="1" dirty="0"/>
+              <a:t>data is immediately available </a:t>
+            </a:r>
+            <a:r>
+              <a:rPr lang="en-US" dirty="0"/>
+              <a:t>and can </a:t>
+            </a:r>
+            <a:r>
+              <a:rPr lang="en-US" b="1" dirty="0"/>
+              <a:t>be reused </a:t>
+            </a:r>
+            <a:r>
+              <a:rPr lang="en-US" dirty="0"/>
+              <a:t>across the platform.</a:t>
+            </a:r>
+            <a:br>
+              <a:rPr lang="en-US" dirty="0"/>
+            </a:br>
+            <a:r>
+              <a:rPr lang="en-US" dirty="0"/>
+              <a:t>For </a:t>
+            </a:r>
+            <a:r>
+              <a:rPr lang="en-US" b="1" dirty="0"/>
+              <a:t>example</a:t>
+            </a:r>
+            <a:r>
+              <a:rPr lang="en-US" dirty="0"/>
+              <a:t>, we can:</a:t>
+            </a:r>
+          </a:p>
+          <a:p>
+            <a:pPr lvl="1"/>
+            <a:r>
+              <a:rPr lang="en-US" dirty="0"/>
+              <a:t>👉Adapt future surveys dynamically </a:t>
+            </a:r>
+          </a:p>
+          <a:p>
+            <a:pPr lvl="1"/>
+            <a:r>
+              <a:rPr lang="en-US" dirty="0"/>
+              <a:t>👉Show feedback to users </a:t>
+            </a:r>
+          </a:p>
+          <a:p>
+            <a:pPr lvl="1"/>
+            <a:r>
+              <a:rPr lang="en-US" dirty="0"/>
+              <a:t>👉Or visualize results with graphs </a:t>
+            </a:r>
+          </a:p>
+          <a:p>
+            <a:r>
+              <a:rPr lang="en-US" dirty="0"/>
+              <a:t>We also have </a:t>
+            </a:r>
+            <a:r>
+              <a:rPr lang="en-US" b="1" dirty="0"/>
+              <a:t>full control</a:t>
+            </a:r>
+            <a:r>
+              <a:rPr lang="en-US" dirty="0"/>
+              <a:t> over how surveys are delivered.</a:t>
+            </a:r>
+          </a:p>
+          <a:p>
+            <a:r>
+              <a:rPr lang="en-US" dirty="0"/>
+              <a:t>We can </a:t>
+            </a:r>
+            <a:r>
+              <a:rPr lang="en-US" b="1" dirty="0"/>
+              <a:t>define</a:t>
+            </a:r>
+            <a:r>
+              <a:rPr lang="en-US" dirty="0"/>
+              <a:t>:</a:t>
+            </a:r>
+          </a:p>
+          <a:p>
+            <a:pPr lvl="1"/>
+            <a:r>
+              <a:rPr lang="en-US" dirty="0"/>
+              <a:t>👉Whether a survey is shown once per user or maybe once per session</a:t>
+            </a:r>
+          </a:p>
+          <a:p>
+            <a:pPr lvl="1"/>
+            <a:r>
+              <a:rPr lang="en-US" dirty="0"/>
+              <a:t>👉Time restrictions, like specific hours </a:t>
+            </a:r>
+          </a:p>
+          <a:p>
+            <a:pPr lvl="1"/>
+            <a:r>
+              <a:rPr lang="en-US" dirty="0"/>
+              <a:t>👉Or expiration rules </a:t>
+            </a:r>
+          </a:p>
+          <a:p>
+            <a:r>
+              <a:rPr lang="en-US" dirty="0"/>
+              <a:t>In addition to the responses, we also collect </a:t>
+            </a:r>
+            <a:r>
+              <a:rPr lang="en-US" b="1" dirty="0"/>
+              <a:t>detailed metadata</a:t>
             </a:r>
             <a:r>
               <a:rPr lang="en-US" dirty="0"/>
@@ -1941,141 +1977,53 @@
           <a:p>
             <a:r>
               <a:rPr lang="en-US" dirty="0"/>
-              <a:t>What you really need is a </a:t>
+              <a:t>So we don’t just see the </a:t>
             </a:r>
             <a:r>
               <a:rPr lang="en-US" b="1" dirty="0"/>
-              <a:t>continuous process</a:t>
-            </a:r>
-            <a:r>
-              <a:rPr lang="en-US" dirty="0"/>
-              <a:t>.</a:t>
-            </a:r>
-          </a:p>
-          <a:p>
-            <a:r>
-              <a:rPr lang="en-US" dirty="0"/>
-              <a:t>For example, you might want to:</a:t>
+              <a:t>final answers</a:t>
+            </a:r>
+            <a:r>
+              <a:rPr lang="en-US" dirty="0"/>
+              <a:t>—we also know:</a:t>
             </a:r>
           </a:p>
           <a:p>
             <a:pPr lvl="1"/>
             <a:r>
               <a:rPr lang="en-US" dirty="0"/>
-              <a:t>👉 Guide users into a program </a:t>
+              <a:t>👉When the survey was started and completed </a:t>
             </a:r>
           </a:p>
           <a:p>
             <a:pPr lvl="1"/>
             <a:r>
               <a:rPr lang="en-US" dirty="0"/>
-              <a:t>👉 Randomize them in groups</a:t>
+              <a:t>👉How much time was spent </a:t>
             </a:r>
           </a:p>
           <a:p>
             <a:pPr lvl="1"/>
             <a:r>
               <a:rPr lang="en-US" dirty="0"/>
-              <a:t>👉 Schedule multiple time points</a:t>
-            </a:r>
-          </a:p>
-          <a:p>
-            <a:pPr lvl="1"/>
-            <a:r>
-              <a:rPr lang="en-US" dirty="0"/>
-              <a:t>👉 Collect data at these multiple time points </a:t>
-            </a:r>
-          </a:p>
-          <a:p>
-            <a:pPr lvl="1"/>
-            <a:r>
-              <a:rPr lang="en-US" dirty="0"/>
-              <a:t>👉 Send notifications and reminders </a:t>
-            </a:r>
-          </a:p>
-          <a:p>
-            <a:pPr lvl="1"/>
-            <a:r>
-              <a:rPr lang="en-US" dirty="0"/>
-              <a:t>👉 Assign users to different conditions </a:t>
-            </a:r>
-          </a:p>
-          <a:p>
-            <a:pPr lvl="1"/>
-            <a:r>
-              <a:rPr lang="en-US" dirty="0"/>
-              <a:t>👉 Adapt what they see based on their responses </a:t>
-            </a:r>
-          </a:p>
-          <a:p>
-            <a:pPr lvl="1"/>
-            <a:r>
-              <a:rPr lang="en-US" dirty="0"/>
-              <a:t>👉 And follow up over time </a:t>
-            </a:r>
-          </a:p>
-          <a:p>
-            <a:pPr lvl="1"/>
-            <a:r>
-              <a:rPr lang="en-US" dirty="0"/>
-              <a:t>👉 You also want this experience to work seamlessly across web and mobile.</a:t>
-            </a:r>
-          </a:p>
-          <a:p>
-            <a:r>
-              <a:rPr lang="en-US" dirty="0"/>
-              <a:t>This is exactly what </a:t>
-            </a:r>
-            <a:r>
-              <a:rPr lang="en-US" b="1" dirty="0" err="1"/>
-              <a:t>SelfHelp</a:t>
+              <a:t>👉And how users moved through it </a:t>
+            </a:r>
+          </a:p>
+          <a:p>
+            <a:r>
+              <a:rPr lang="en-US" dirty="0"/>
+              <a:t>This gives us much deeper insight into users behavior.</a:t>
+            </a:r>
+          </a:p>
+          <a:p>
+            <a:r>
+              <a:rPr lang="en-US" dirty="0"/>
+              <a:t>As you see we don’t just use surveys—we </a:t>
             </a:r>
             <a:r>
               <a:rPr lang="en-US" b="1" dirty="0"/>
-              <a:t> enables.</a:t>
-            </a:r>
-          </a:p>
-          <a:p>
-            <a:r>
-              <a:rPr lang="en-US" dirty="0"/>
-              <a:t>So the key idea is:</a:t>
-            </a:r>
-          </a:p>
-          <a:p>
-            <a:r>
-              <a:rPr lang="en-US" dirty="0"/>
-              <a:t>👉 </a:t>
-            </a:r>
-            <a:r>
-              <a:rPr lang="en-US" dirty="0" err="1"/>
-              <a:t>SelfHelp</a:t>
-            </a:r>
-            <a:r>
-              <a:rPr lang="en-US" dirty="0"/>
-              <a:t> doesn’t just support </a:t>
-            </a:r>
-            <a:r>
-              <a:rPr lang="en-US" b="1" dirty="0"/>
-              <a:t>individual interactions</a:t>
-            </a:r>
-            <a:br>
-              <a:rPr lang="en-US" dirty="0"/>
-            </a:br>
-            <a:r>
-              <a:rPr lang="en-US" dirty="0"/>
-              <a:t>👉 It supports </a:t>
-            </a:r>
-            <a:r>
-              <a:rPr lang="en-US" b="1" dirty="0"/>
-              <a:t>structured, long-term processes from start to finish</a:t>
-            </a:r>
-            <a:r>
-              <a:rPr lang="en-US" dirty="0"/>
-              <a:t>.</a:t>
-            </a:r>
-          </a:p>
-          <a:p>
-            <a:endParaRPr lang="LID4096" dirty="0"/>
+              <a:t>fully integrate them into the system.</a:t>
+            </a:r>
           </a:p>
         </p:txBody>
       </p:sp>
@@ -2105,7 +2053,7 @@
     </p:spTree>
     <p:extLst>
       <p:ext uri="{BB962C8B-B14F-4D97-AF65-F5344CB8AC3E}">
-        <p14:creationId xmlns:p14="http://schemas.microsoft.com/office/powerpoint/2010/main" val="3552500681"/>
+        <p14:creationId xmlns:p14="http://schemas.microsoft.com/office/powerpoint/2010/main" val="3574694730"/>
       </p:ext>
     </p:extLst>
   </p:cSld>
@@ -2161,219 +2109,173 @@
           <a:p>
             <a:r>
               <a:rPr lang="en-US" dirty="0"/>
-              <a:t>As you’ve seen, the platform </a:t>
+              <a:t>The second plugin I want to present is the </a:t>
             </a:r>
             <a:r>
               <a:rPr lang="en-US" b="1" dirty="0"/>
-              <a:t>has grown </a:t>
-            </a:r>
-            <a:r>
-              <a:rPr lang="en-US" dirty="0"/>
-              <a:t>a lot over the years.</a:t>
-            </a:r>
-          </a:p>
-          <a:p>
-            <a:r>
-              <a:rPr lang="en-US" dirty="0"/>
-              <a:t>So it became very important for us to </a:t>
+              <a:t>LLM plugin</a:t>
+            </a:r>
+            <a:r>
+              <a:rPr lang="en-US" dirty="0"/>
+              <a:t>.</a:t>
+            </a:r>
+          </a:p>
+          <a:p>
+            <a:r>
+              <a:rPr lang="en-US" dirty="0"/>
+              <a:t>Here I want to show you how </a:t>
+            </a:r>
+            <a:r>
+              <a:rPr lang="en-US"/>
+              <a:t>we actually use </a:t>
+            </a:r>
+            <a:r>
+              <a:rPr lang="en-US" dirty="0"/>
+              <a:t>Large Language Models </a:t>
             </a:r>
             <a:r>
               <a:rPr lang="en-US" b="1" dirty="0"/>
-              <a:t>keep it maintainable</a:t>
-            </a:r>
-            <a:r>
-              <a:rPr lang="en-US" dirty="0"/>
-              <a:t>—and also </a:t>
+              <a:t>in </a:t>
+            </a:r>
+            <a:r>
+              <a:rPr lang="en-US" b="1" dirty="0" err="1"/>
+              <a:t>SelfHelp</a:t>
+            </a:r>
+            <a:r>
+              <a:rPr lang="en-US" dirty="0"/>
+              <a:t>.</a:t>
+            </a:r>
+          </a:p>
+          <a:p>
+            <a:endParaRPr lang="en-US" dirty="0"/>
+          </a:p>
+          <a:p>
+            <a:r>
+              <a:rPr lang="en-US" dirty="0"/>
+              <a:t>Before I continue I want to point it out, that </a:t>
             </a:r>
             <a:r>
               <a:rPr lang="en-US" b="1" dirty="0"/>
-              <a:t>lightweight when deployed on servers</a:t>
-            </a:r>
-            <a:r>
-              <a:rPr lang="en-US" dirty="0"/>
-              <a:t>.</a:t>
-            </a:r>
-            <a:br>
-              <a:rPr lang="en-US" dirty="0"/>
-            </a:br>
+              <a:t>AI can be unpredictable… a bit random</a:t>
+            </a:r>
+            <a:r>
+              <a:rPr lang="en-US" dirty="0"/>
+              <a:t>. So the key question is: how do we make it behave in a </a:t>
+            </a:r>
             <a:r>
               <a:rPr lang="en-US" b="1" dirty="0"/>
-              <a:t>Not every project </a:t>
-            </a:r>
-            <a:r>
-              <a:rPr lang="en-US" dirty="0"/>
-              <a:t>needs all features.</a:t>
-            </a:r>
-          </a:p>
-          <a:p>
-            <a:r>
-              <a:rPr lang="en-US" dirty="0"/>
-              <a:t>That’s why we introduced a </a:t>
+              <a:t>more controlled and reliable way</a:t>
+            </a:r>
+            <a:r>
+              <a:rPr lang="en-US" dirty="0"/>
+              <a:t>?</a:t>
+            </a:r>
+          </a:p>
+          <a:p>
+            <a:endParaRPr lang="en-US" dirty="0"/>
+          </a:p>
+          <a:p>
+            <a:r>
+              <a:rPr lang="en-US" dirty="0"/>
+              <a:t>This is where </a:t>
             </a:r>
             <a:r>
               <a:rPr lang="en-US" b="1" dirty="0"/>
-              <a:t>plugin system</a:t>
-            </a:r>
-            <a:r>
-              <a:rPr lang="en-US" dirty="0"/>
-              <a:t>.</a:t>
-            </a:r>
-          </a:p>
-          <a:p>
-            <a:r>
-              <a:rPr lang="en-US" dirty="0"/>
-              <a:t>The idea is simple:</a:t>
-            </a:r>
-            <a:br>
-              <a:rPr lang="en-US" dirty="0"/>
-            </a:br>
-            <a:r>
-              <a:rPr lang="en-US" dirty="0"/>
-              <a:t>Any functionality that doesn’t belong to the core system is </a:t>
+              <a:t>prompts</a:t>
+            </a:r>
+            <a:r>
+              <a:rPr lang="en-US" dirty="0"/>
+              <a:t> and </a:t>
             </a:r>
             <a:r>
               <a:rPr lang="en-US" b="1" dirty="0"/>
-              <a:t>added as a plugin</a:t>
-            </a:r>
-            <a:r>
-              <a:rPr lang="en-US" dirty="0"/>
-              <a:t>.</a:t>
-            </a:r>
-          </a:p>
-          <a:p>
-            <a:r>
-              <a:rPr lang="en-US" dirty="0"/>
-              <a:t>This has </a:t>
+              <a:t>context</a:t>
+            </a:r>
+            <a:r>
+              <a:rPr lang="en-US" dirty="0"/>
+              <a:t> come in.</a:t>
+            </a:r>
+          </a:p>
+          <a:p>
+            <a:endParaRPr lang="en-US" dirty="0"/>
+          </a:p>
+          <a:p>
+            <a:r>
+              <a:rPr lang="en-US" dirty="0"/>
+              <a:t>A prompt is simply </a:t>
             </a:r>
             <a:r>
               <a:rPr lang="en-US" b="1" dirty="0"/>
-              <a:t>two main advantages.</a:t>
+              <a:t>the instruction we give </a:t>
+            </a:r>
+            <a:r>
+              <a:rPr lang="en-US" dirty="0"/>
+              <a:t>to the AI—it defines the task. For </a:t>
+            </a:r>
+            <a:r>
+              <a:rPr lang="en-US" b="1" dirty="0"/>
+              <a:t>example</a:t>
+            </a:r>
+            <a:r>
+              <a:rPr lang="en-US" dirty="0"/>
+              <a:t>: </a:t>
+            </a:r>
+            <a:r>
+              <a:rPr lang="en-US" i="1" dirty="0"/>
+              <a:t>‘Explain depression.’</a:t>
+            </a:r>
+          </a:p>
+          <a:p>
+            <a:endParaRPr lang="en-US" dirty="0"/>
+          </a:p>
+          <a:p>
+            <a:r>
+              <a:rPr lang="en-US" dirty="0"/>
+              <a:t>But the </a:t>
+            </a:r>
+            <a:r>
+              <a:rPr lang="en-US" b="1" dirty="0"/>
+              <a:t>prompt alone is not enough.</a:t>
+            </a:r>
+          </a:p>
+          <a:p>
+            <a:endParaRPr lang="en-US" b="1" dirty="0"/>
+          </a:p>
+          <a:p>
+            <a:r>
+              <a:rPr lang="en-US" dirty="0"/>
+              <a:t>We also need </a:t>
+            </a:r>
+            <a:r>
+              <a:rPr lang="en-US" b="1" dirty="0"/>
+              <a:t>context</a:t>
+            </a:r>
+            <a:r>
+              <a:rPr lang="en-US" dirty="0"/>
+              <a:t>, which defines the situation or the audience.</a:t>
+            </a:r>
+          </a:p>
+          <a:p>
+            <a:endParaRPr lang="en-US" dirty="0"/>
+          </a:p>
+          <a:p>
+            <a:r>
+              <a:rPr lang="en-US" dirty="0"/>
+              <a:t>For example, we could say:</a:t>
             </a:r>
           </a:p>
           <a:p>
             <a:pPr lvl="1"/>
             <a:r>
               <a:rPr lang="en-US" dirty="0"/>
-              <a:t>👉First, from a </a:t>
-            </a:r>
-            <a:r>
-              <a:rPr lang="en-US" b="1" dirty="0"/>
-              <a:t>development perspective</a:t>
-            </a:r>
-            <a:r>
-              <a:rPr lang="en-US" dirty="0"/>
-              <a:t>, it keeps the </a:t>
-            </a:r>
-            <a:r>
-              <a:rPr lang="en-US" b="1" dirty="0"/>
-              <a:t>code cleaner, better organized, and easier to maintain.</a:t>
+              <a:t>👉“You are a professor teaching students” </a:t>
             </a:r>
           </a:p>
           <a:p>
             <a:pPr lvl="1"/>
             <a:r>
               <a:rPr lang="en-US" dirty="0"/>
-              <a:t>👉Second, from a </a:t>
-            </a:r>
-            <a:r>
-              <a:rPr lang="en-US" b="1" dirty="0"/>
-              <a:t>deployment perspective</a:t>
-            </a:r>
-            <a:r>
-              <a:rPr lang="en-US" dirty="0"/>
-              <a:t>, it keeps the </a:t>
-            </a:r>
-            <a:r>
-              <a:rPr lang="en-US" b="1" dirty="0"/>
-              <a:t>system lightweight</a:t>
-            </a:r>
-            <a:r>
-              <a:rPr lang="en-US" dirty="0"/>
-              <a:t>.</a:t>
-            </a:r>
-          </a:p>
-          <a:p>
-            <a:pPr lvl="0"/>
-            <a:r>
-              <a:rPr lang="en-US" dirty="0"/>
-              <a:t>If a project doesn’t need certain features, they simply don’t have to be installed.</a:t>
-            </a:r>
-          </a:p>
-          <a:p>
-            <a:r>
-              <a:rPr lang="en-US" dirty="0"/>
-              <a:t>We already</a:t>
-            </a:r>
-            <a:r>
-              <a:rPr lang="en-US" b="1" dirty="0"/>
-              <a:t> developed several plugins</a:t>
-            </a:r>
-            <a:r>
-              <a:rPr lang="en-US" dirty="0"/>
-              <a:t>, for example:</a:t>
-            </a:r>
-          </a:p>
-          <a:p>
-            <a:pPr lvl="1"/>
-            <a:r>
-              <a:rPr lang="en-US" dirty="0"/>
-              <a:t>👉External authentication </a:t>
-            </a:r>
-          </a:p>
-          <a:p>
-            <a:pPr lvl="1"/>
-            <a:r>
-              <a:rPr lang="en-US" dirty="0"/>
-              <a:t>👉Lab.js integration </a:t>
-            </a:r>
-          </a:p>
-          <a:p>
-            <a:pPr lvl="1"/>
-            <a:r>
-              <a:rPr lang="en-US" dirty="0"/>
-              <a:t>👉R integration </a:t>
-            </a:r>
-          </a:p>
-          <a:p>
-            <a:pPr lvl="1"/>
-            <a:r>
-              <a:rPr lang="en-US" dirty="0"/>
-              <a:t>👉Custom formulas </a:t>
-            </a:r>
-          </a:p>
-          <a:p>
-            <a:pPr lvl="1"/>
-            <a:r>
-              <a:rPr lang="en-US" dirty="0"/>
-              <a:t>👉API import and export </a:t>
-            </a:r>
-          </a:p>
-          <a:p>
-            <a:pPr lvl="1"/>
-            <a:r>
-              <a:rPr lang="en-US" dirty="0"/>
-              <a:t>👉Plotly.js – library for graphs</a:t>
-            </a:r>
-          </a:p>
-          <a:p>
-            <a:r>
-              <a:rPr lang="en-US" dirty="0"/>
-              <a:t>In the next slides, I’ll focus on </a:t>
-            </a:r>
-            <a:r>
-              <a:rPr lang="en-US" b="1" dirty="0"/>
-              <a:t>three specific plugins:</a:t>
-            </a:r>
-            <a:br>
-              <a:rPr lang="en-US" dirty="0"/>
-            </a:br>
-            <a:r>
-              <a:rPr lang="en-US" dirty="0" err="1"/>
-              <a:t>SurveyJS</a:t>
-            </a:r>
-            <a:r>
-              <a:rPr lang="en-US" dirty="0"/>
-              <a:t>, LLM, and the LLM Therapy Chat.</a:t>
+              <a:t>👉Or: “You are a therapist talking to a patient” </a:t>
             </a:r>
           </a:p>
         </p:txBody>
@@ -2404,7 +2306,7 @@
     </p:spTree>
     <p:extLst>
       <p:ext uri="{BB962C8B-B14F-4D97-AF65-F5344CB8AC3E}">
-        <p14:creationId xmlns:p14="http://schemas.microsoft.com/office/powerpoint/2010/main" val="3374709414"/>
+        <p14:creationId xmlns:p14="http://schemas.microsoft.com/office/powerpoint/2010/main" val="4187562878"/>
       </p:ext>
     </p:extLst>
   </p:cSld>
@@ -2419,7 +2321,13 @@
   <p:cSld>
     <p:spTree>
       <p:nvGrpSpPr>
-        <p:cNvPr id="1" name=""/>
+        <p:cNvPr id="1" name="">
+          <a:extLst>
+            <a:ext uri="{FF2B5EF4-FFF2-40B4-BE49-F238E27FC236}">
+              <a16:creationId xmlns:a16="http://schemas.microsoft.com/office/drawing/2014/main" id="{0838D375-7CDB-27DC-268C-0CA80F142773}"/>
+            </a:ext>
+          </a:extLst>
+        </p:cNvPr>
         <p:cNvGrpSpPr/>
         <p:nvPr/>
       </p:nvGrpSpPr>
@@ -2433,7 +2341,13 @@
       </p:grpSpPr>
       <p:sp>
         <p:nvSpPr>
-          <p:cNvPr id="2" name="Slide Image Placeholder 1"/>
+          <p:cNvPr id="2" name="Slide Image Placeholder 1">
+            <a:extLst>
+              <a:ext uri="{FF2B5EF4-FFF2-40B4-BE49-F238E27FC236}">
+                <a16:creationId xmlns:a16="http://schemas.microsoft.com/office/drawing/2014/main" id="{B24F55F2-E30F-A5B6-D497-D7DE79928839}"/>
+              </a:ext>
+            </a:extLst>
+          </p:cNvPr>
           <p:cNvSpPr>
             <a:spLocks noGrp="1" noRot="1" noChangeAspect="1"/>
           </p:cNvSpPr>
@@ -2445,7 +2359,13 @@
       </p:sp>
       <p:sp>
         <p:nvSpPr>
-          <p:cNvPr id="3" name="Notes Placeholder 2"/>
+          <p:cNvPr id="3" name="Notes Placeholder 2">
+            <a:extLst>
+              <a:ext uri="{FF2B5EF4-FFF2-40B4-BE49-F238E27FC236}">
+                <a16:creationId xmlns:a16="http://schemas.microsoft.com/office/drawing/2014/main" id="{865DEC7C-245F-42A7-5237-1EDE8B3BD12E}"/>
+              </a:ext>
+            </a:extLst>
+          </p:cNvPr>
           <p:cNvSpPr>
             <a:spLocks noGrp="1"/>
           </p:cNvSpPr>
@@ -2460,44 +2380,135 @@
           <a:p>
             <a:r>
               <a:rPr lang="en-US" dirty="0"/>
-              <a:t>The first plugin I want to talk about is </a:t>
-            </a:r>
-            <a:r>
-              <a:rPr lang="en-US" b="1" dirty="0" err="1"/>
-              <a:t>SurveyJS</a:t>
+              <a:t>Even though the prompt </a:t>
+            </a:r>
+            <a:r>
+              <a:rPr lang="en-US" b="1" dirty="0"/>
+              <a:t>stays the same</a:t>
+            </a:r>
+            <a:r>
+              <a:rPr lang="en-US" dirty="0"/>
+              <a:t>, the result </a:t>
+            </a:r>
+            <a:r>
+              <a:rPr lang="en-US" b="1" dirty="0"/>
+              <a:t>will be very different</a:t>
             </a:r>
             <a:r>
               <a:rPr lang="en-US" dirty="0"/>
               <a:t>.</a:t>
             </a:r>
+          </a:p>
+          <a:p>
+            <a:r>
+              <a:rPr lang="en-US" dirty="0"/>
+              <a:t>In one case, the explanation will be </a:t>
+            </a:r>
+            <a:r>
+              <a:rPr lang="en-US" b="1" dirty="0"/>
+              <a:t>more academic</a:t>
+            </a:r>
+            <a:r>
+              <a:rPr lang="en-US" dirty="0"/>
+              <a:t>.</a:t>
+            </a:r>
             <a:br>
               <a:rPr lang="en-US" dirty="0"/>
             </a:br>
             <a:r>
+              <a:rPr lang="en-US" dirty="0"/>
+              <a:t>In the other, it will </a:t>
+            </a:r>
+            <a:r>
               <a:rPr lang="en-US" b="1" dirty="0"/>
-              <a:t>The idea is very simple</a:t>
-            </a:r>
-            <a:r>
-              <a:rPr lang="en-US" dirty="0"/>
-              <a:t>: we can </a:t>
+              <a:t>be simpler </a:t>
+            </a:r>
+            <a:r>
+              <a:rPr lang="en-US" dirty="0"/>
+              <a:t>and more empathetic.</a:t>
+            </a:r>
+          </a:p>
+          <a:p>
+            <a:endParaRPr lang="en-US" dirty="0"/>
+          </a:p>
+          <a:p>
+            <a:r>
+              <a:rPr lang="en-US" dirty="0"/>
+              <a:t>So in simple terms:</a:t>
+            </a:r>
+          </a:p>
+          <a:p>
+            <a:r>
+              <a:rPr lang="en-US" dirty="0"/>
+              <a:t>           👉 </a:t>
             </a:r>
             <a:r>
               <a:rPr lang="en-US" b="1" dirty="0"/>
-              <a:t>design and manage surveys </a:t>
-            </a:r>
-            <a:r>
-              <a:rPr lang="en-US" dirty="0"/>
-              <a:t>directly inside our platform.</a:t>
-            </a:r>
-          </a:p>
-          <a:p>
-            <a:r>
-              <a:rPr lang="en-US" dirty="0"/>
-              <a:t>That means </a:t>
+              <a:t>The prompt defines </a:t>
+            </a:r>
+            <a:r>
+              <a:rPr lang="en-US" b="1" i="1" dirty="0"/>
+              <a:t>what</a:t>
             </a:r>
             <a:r>
               <a:rPr lang="en-US" b="1" dirty="0"/>
-              <a:t>we can</a:t>
+              <a:t> we want</a:t>
+            </a:r>
+            <a:br>
+              <a:rPr lang="en-US" dirty="0"/>
+            </a:br>
+            <a:r>
+              <a:rPr lang="en-US" dirty="0"/>
+              <a:t>           👉 </a:t>
+            </a:r>
+            <a:r>
+              <a:rPr lang="en-US" b="1" dirty="0"/>
+              <a:t>The context defines </a:t>
+            </a:r>
+            <a:r>
+              <a:rPr lang="en-US" b="1" i="1" dirty="0"/>
+              <a:t>how</a:t>
+            </a:r>
+            <a:r>
+              <a:rPr lang="en-US" b="1" dirty="0"/>
+              <a:t> it should be delivered</a:t>
+            </a:r>
+          </a:p>
+          <a:p>
+            <a:r>
+              <a:rPr lang="en-US" dirty="0"/>
+              <a:t>And together, they </a:t>
+            </a:r>
+            <a:r>
+              <a:rPr lang="en-US" b="1" dirty="0"/>
+              <a:t>shape the final result.</a:t>
+            </a:r>
+          </a:p>
+          <a:p>
+            <a:endParaRPr lang="en-US" b="1" dirty="0"/>
+          </a:p>
+          <a:p>
+            <a:r>
+              <a:rPr lang="en-US" dirty="0"/>
+              <a:t>To make this more reliable, we introduced a </a:t>
+            </a:r>
+            <a:r>
+              <a:rPr lang="en-US" b="1" dirty="0"/>
+              <a:t>prompt &amp; context management system</a:t>
+            </a:r>
+            <a:r>
+              <a:rPr lang="en-US" dirty="0"/>
+              <a:t>.</a:t>
+            </a:r>
+          </a:p>
+          <a:p>
+            <a:r>
+              <a:rPr lang="en-US" dirty="0"/>
+              <a:t>With </a:t>
+            </a:r>
+            <a:r>
+              <a:rPr lang="en-US" b="1" dirty="0"/>
+              <a:t>this system, we can</a:t>
             </a:r>
             <a:r>
               <a:rPr lang="en-US" dirty="0"/>
@@ -2508,214 +2519,83 @@
             <a:pPr lvl="1"/>
             <a:r>
               <a:rPr lang="en-US" dirty="0"/>
-              <a:t>👉Create surveys </a:t>
+              <a:t>👉Store and version prompts and contexts </a:t>
             </a:r>
           </a:p>
           <a:p>
             <a:pPr lvl="1"/>
             <a:r>
               <a:rPr lang="en-US" dirty="0"/>
-              <a:t>👉Store and version them </a:t>
+              <a:t>👉Test them in a playground </a:t>
             </a:r>
           </a:p>
           <a:p>
             <a:pPr lvl="1"/>
             <a:r>
               <a:rPr lang="en-US" dirty="0"/>
-              <a:t>👉And publish them when they’re ready </a:t>
-            </a:r>
-          </a:p>
-          <a:p>
-            <a:r>
-              <a:rPr lang="en-US" dirty="0"/>
-              <a:t>Once published, these surveys can </a:t>
+              <a:t>👉Run them across different modules </a:t>
+            </a:r>
+          </a:p>
+          <a:p>
+            <a:pPr lvl="1"/>
+            <a:r>
+              <a:rPr lang="en-US" dirty="0"/>
+              <a:t>👉Create datasets to evaluate responses </a:t>
+            </a:r>
+          </a:p>
+          <a:p>
+            <a:pPr lvl="1"/>
+            <a:r>
+              <a:rPr lang="en-US" dirty="0"/>
+              <a:t>👉And continuously refine everything based on the results </a:t>
+            </a:r>
+          </a:p>
+          <a:p>
+            <a:r>
+              <a:rPr lang="en-US" dirty="0"/>
+              <a:t>This allows us to systematically </a:t>
             </a:r>
             <a:r>
               <a:rPr lang="en-US" b="1" dirty="0"/>
-              <a:t>be used directly in the system</a:t>
-            </a:r>
-            <a:r>
-              <a:rPr lang="en-US" dirty="0"/>
-              <a:t>—without relying on external tools.</a:t>
-            </a:r>
-          </a:p>
-          <a:p>
-            <a:r>
-              <a:rPr lang="en-US" dirty="0"/>
-              <a:t>All collected </a:t>
+              <a:t>improve how the AI behaves in our platform.</a:t>
+            </a:r>
+          </a:p>
+          <a:p>
+            <a:endParaRPr lang="en-US" b="1" dirty="0"/>
+          </a:p>
+          <a:p>
+            <a:r>
+              <a:rPr lang="en-US" dirty="0"/>
+              <a:t>So in the end, this is </a:t>
             </a:r>
             <a:r>
               <a:rPr lang="en-US" b="1" dirty="0"/>
-              <a:t>data is immediately available </a:t>
-            </a:r>
-            <a:r>
-              <a:rPr lang="en-US" dirty="0"/>
-              <a:t>and can </a:t>
+              <a:t>not just a simple chatbot. </a:t>
+            </a:r>
+            <a:r>
+              <a:rPr lang="en-US" dirty="0"/>
+              <a:t>It’s a </a:t>
             </a:r>
             <a:r>
               <a:rPr lang="en-US" b="1" dirty="0"/>
-              <a:t>be reused </a:t>
-            </a:r>
-            <a:r>
-              <a:rPr lang="en-US" dirty="0"/>
-              <a:t>across the platform.</a:t>
-            </a:r>
-            <a:br>
-              <a:rPr lang="en-US" dirty="0"/>
-            </a:br>
-            <a:r>
-              <a:rPr lang="en-US" dirty="0"/>
-              <a:t>For </a:t>
-            </a:r>
-            <a:r>
-              <a:rPr lang="en-US" b="1" dirty="0"/>
-              <a:t>example</a:t>
-            </a:r>
-            <a:r>
-              <a:rPr lang="en-US" dirty="0"/>
-              <a:t>, we can:</a:t>
-            </a:r>
-          </a:p>
-          <a:p>
-            <a:pPr lvl="1"/>
-            <a:r>
-              <a:rPr lang="en-US" dirty="0"/>
-              <a:t>👉Adapt future surveys dynamically </a:t>
-            </a:r>
-          </a:p>
-          <a:p>
-            <a:pPr lvl="1"/>
-            <a:r>
-              <a:rPr lang="en-US" dirty="0"/>
-              <a:t>👉Show feedback to users </a:t>
-            </a:r>
-          </a:p>
-          <a:p>
-            <a:pPr lvl="1"/>
-            <a:r>
-              <a:rPr lang="en-US" dirty="0"/>
-              <a:t>👉Or visualize results with graphs </a:t>
-            </a:r>
-          </a:p>
-          <a:p>
-            <a:r>
-              <a:rPr lang="en-US" dirty="0"/>
-              <a:t>We also have </a:t>
-            </a:r>
-            <a:r>
-              <a:rPr lang="en-US" b="1" dirty="0"/>
-              <a:t>full control</a:t>
-            </a:r>
-            <a:r>
-              <a:rPr lang="en-US" dirty="0"/>
-              <a:t> over how surveys are delivered.</a:t>
-            </a:r>
-          </a:p>
-          <a:p>
-            <a:r>
-              <a:rPr lang="en-US" dirty="0"/>
-              <a:t>We can </a:t>
-            </a:r>
-            <a:r>
-              <a:rPr lang="en-US" b="1" dirty="0"/>
-              <a:t>define</a:t>
-            </a:r>
-            <a:r>
-              <a:rPr lang="en-US" dirty="0"/>
-              <a:t>:</a:t>
-            </a:r>
-          </a:p>
-          <a:p>
-            <a:pPr lvl="1"/>
-            <a:r>
-              <a:rPr lang="en-US" dirty="0"/>
-              <a:t>👉Whether a survey is shown once per user or maybe once per session</a:t>
-            </a:r>
-          </a:p>
-          <a:p>
-            <a:pPr lvl="1"/>
-            <a:r>
-              <a:rPr lang="en-US" dirty="0"/>
-              <a:t>👉Time restrictions, like specific hours </a:t>
-            </a:r>
-          </a:p>
-          <a:p>
-            <a:pPr lvl="1"/>
-            <a:r>
-              <a:rPr lang="en-US" dirty="0"/>
-              <a:t>👉Or expiration rules </a:t>
-            </a:r>
-          </a:p>
-          <a:p>
-            <a:r>
-              <a:rPr lang="en-US" dirty="0"/>
-              <a:t>In addition to the responses, we also collect </a:t>
-            </a:r>
-            <a:r>
-              <a:rPr lang="en-US" b="1" dirty="0"/>
-              <a:t>detailed metadata</a:t>
-            </a:r>
-            <a:r>
-              <a:rPr lang="en-US" dirty="0"/>
-              <a:t>.</a:t>
-            </a:r>
-          </a:p>
-          <a:p>
-            <a:r>
-              <a:rPr lang="en-US" dirty="0"/>
-              <a:t>So we don’t just see the </a:t>
-            </a:r>
-            <a:r>
-              <a:rPr lang="en-US" b="1" dirty="0"/>
-              <a:t>final answers</a:t>
-            </a:r>
-            <a:r>
-              <a:rPr lang="en-US" dirty="0"/>
-              <a:t>—we also know:</a:t>
-            </a:r>
-          </a:p>
-          <a:p>
-            <a:pPr lvl="1"/>
-            <a:r>
-              <a:rPr lang="en-US" dirty="0"/>
-              <a:t>👉When the survey was started and completed </a:t>
-            </a:r>
-          </a:p>
-          <a:p>
-            <a:pPr lvl="1"/>
-            <a:r>
-              <a:rPr lang="en-US" dirty="0"/>
-              <a:t>👉How much time was spent </a:t>
-            </a:r>
-          </a:p>
-          <a:p>
-            <a:pPr lvl="1"/>
-            <a:r>
-              <a:rPr lang="en-US" dirty="0"/>
-              <a:t>👉And how users moved through it </a:t>
-            </a:r>
-          </a:p>
-          <a:p>
-            <a:r>
-              <a:rPr lang="en-US" dirty="0"/>
-              <a:t>This gives us much deeper insight into users behavior.</a:t>
-            </a:r>
-          </a:p>
-          <a:p>
-            <a:r>
-              <a:rPr lang="en-US" dirty="0"/>
-              <a:t>As a summary we don’t just use surveys—we </a:t>
-            </a:r>
-            <a:r>
-              <a:rPr lang="en-US" b="1" dirty="0"/>
-              <a:t>fully integrate them into the system.</a:t>
-            </a:r>
-          </a:p>
-        </p:txBody>
-      </p:sp>
-      <p:sp>
-        <p:nvSpPr>
-          <p:cNvPr id="4" name="Slide Number Placeholder 3"/>
+              <a:t>controlled and evolving system </a:t>
+            </a:r>
+            <a:r>
+              <a:rPr lang="en-US" dirty="0"/>
+              <a:t>for working with LLMs.</a:t>
+            </a:r>
+          </a:p>
+        </p:txBody>
+      </p:sp>
+      <p:sp>
+        <p:nvSpPr>
+          <p:cNvPr id="4" name="Slide Number Placeholder 3">
+            <a:extLst>
+              <a:ext uri="{FF2B5EF4-FFF2-40B4-BE49-F238E27FC236}">
+                <a16:creationId xmlns:a16="http://schemas.microsoft.com/office/drawing/2014/main" id="{6609D09F-D749-CD12-2EFC-D3A7A53086BE}"/>
+              </a:ext>
+            </a:extLst>
+          </p:cNvPr>
           <p:cNvSpPr>
             <a:spLocks noGrp="1"/>
           </p:cNvSpPr>
@@ -2739,7 +2619,7 @@
     </p:spTree>
     <p:extLst>
       <p:ext uri="{BB962C8B-B14F-4D97-AF65-F5344CB8AC3E}">
-        <p14:creationId xmlns:p14="http://schemas.microsoft.com/office/powerpoint/2010/main" val="3574694730"/>
+        <p14:creationId xmlns:p14="http://schemas.microsoft.com/office/powerpoint/2010/main" val="2882498502"/>
       </p:ext>
     </p:extLst>
   </p:cSld>
@@ -2795,435 +2675,6 @@
           <a:p>
             <a:r>
               <a:rPr lang="en-US" dirty="0"/>
-              <a:t>The second plugin I want to present is the </a:t>
-            </a:r>
-            <a:r>
-              <a:rPr lang="en-US" b="1" dirty="0"/>
-              <a:t>LLM plugin</a:t>
-            </a:r>
-            <a:r>
-              <a:rPr lang="en-US" dirty="0"/>
-              <a:t>.</a:t>
-            </a:r>
-          </a:p>
-          <a:p>
-            <a:r>
-              <a:rPr lang="en-US" dirty="0"/>
-              <a:t>I assume most of you already know what an LLM is, so the interesting part here is not the general idea of AI—but how we actually use it </a:t>
-            </a:r>
-            <a:r>
-              <a:rPr lang="en-US" b="1" dirty="0"/>
-              <a:t>in </a:t>
-            </a:r>
-            <a:r>
-              <a:rPr lang="en-US" b="1" dirty="0" err="1"/>
-              <a:t>SelfHelp</a:t>
-            </a:r>
-            <a:r>
-              <a:rPr lang="en-US" dirty="0"/>
-              <a:t>.</a:t>
-            </a:r>
-          </a:p>
-          <a:p>
-            <a:r>
-              <a:rPr lang="en-US" dirty="0"/>
-              <a:t>One important thing to understand is that </a:t>
-            </a:r>
-            <a:r>
-              <a:rPr lang="en-US" b="1" dirty="0"/>
-              <a:t>AI can be unpredictable… a bit random</a:t>
-            </a:r>
-            <a:r>
-              <a:rPr lang="en-US" dirty="0"/>
-              <a:t>. So the key question is: how do we make it behave in a </a:t>
-            </a:r>
-            <a:r>
-              <a:rPr lang="en-US" b="1" dirty="0"/>
-              <a:t>more controlled and reliable way</a:t>
-            </a:r>
-            <a:r>
-              <a:rPr lang="en-US" dirty="0"/>
-              <a:t>?</a:t>
-            </a:r>
-          </a:p>
-          <a:p>
-            <a:r>
-              <a:rPr lang="en-US" dirty="0"/>
-              <a:t>This is where </a:t>
-            </a:r>
-            <a:r>
-              <a:rPr lang="en-US" b="1" dirty="0"/>
-              <a:t>prompts</a:t>
-            </a:r>
-            <a:r>
-              <a:rPr lang="en-US" dirty="0"/>
-              <a:t> and </a:t>
-            </a:r>
-            <a:r>
-              <a:rPr lang="en-US" b="1" dirty="0"/>
-              <a:t>context</a:t>
-            </a:r>
-            <a:r>
-              <a:rPr lang="en-US" dirty="0"/>
-              <a:t> come in.</a:t>
-            </a:r>
-          </a:p>
-          <a:p>
-            <a:r>
-              <a:rPr lang="en-US" dirty="0"/>
-              <a:t>A prompt is simply </a:t>
-            </a:r>
-            <a:r>
-              <a:rPr lang="en-US" b="1" dirty="0"/>
-              <a:t>the instruction we give </a:t>
-            </a:r>
-            <a:r>
-              <a:rPr lang="en-US" dirty="0"/>
-              <a:t>to the AI—it defines the task. For </a:t>
-            </a:r>
-            <a:r>
-              <a:rPr lang="en-US" b="1" dirty="0"/>
-              <a:t>example</a:t>
-            </a:r>
-            <a:r>
-              <a:rPr lang="en-US" dirty="0"/>
-              <a:t>: </a:t>
-            </a:r>
-            <a:r>
-              <a:rPr lang="en-US" i="1" dirty="0"/>
-              <a:t>‘Explain depression.’</a:t>
-            </a:r>
-            <a:endParaRPr lang="en-US" dirty="0"/>
-          </a:p>
-          <a:p>
-            <a:r>
-              <a:rPr lang="en-US" dirty="0"/>
-              <a:t>But the </a:t>
-            </a:r>
-            <a:r>
-              <a:rPr lang="en-US" b="1" dirty="0"/>
-              <a:t>prompt alone is not enough.</a:t>
-            </a:r>
-          </a:p>
-          <a:p>
-            <a:r>
-              <a:rPr lang="en-US" dirty="0"/>
-              <a:t>We also need </a:t>
-            </a:r>
-            <a:r>
-              <a:rPr lang="en-US" b="1" dirty="0"/>
-              <a:t>context</a:t>
-            </a:r>
-            <a:r>
-              <a:rPr lang="en-US" dirty="0"/>
-              <a:t>, which defines the situation or the audience.</a:t>
-            </a:r>
-          </a:p>
-          <a:p>
-            <a:r>
-              <a:rPr lang="en-US" dirty="0"/>
-              <a:t>For example, we could say:</a:t>
-            </a:r>
-          </a:p>
-          <a:p>
-            <a:pPr lvl="1"/>
-            <a:r>
-              <a:rPr lang="en-US" dirty="0"/>
-              <a:t>👉“You are a professor teaching students” </a:t>
-            </a:r>
-          </a:p>
-          <a:p>
-            <a:pPr lvl="1"/>
-            <a:r>
-              <a:rPr lang="en-US" dirty="0"/>
-              <a:t>👉Or: “You are a therapist talking to a patient” </a:t>
-            </a:r>
-          </a:p>
-          <a:p>
-            <a:r>
-              <a:rPr lang="en-US" dirty="0"/>
-              <a:t>Even though the prompt </a:t>
-            </a:r>
-            <a:r>
-              <a:rPr lang="en-US" b="1" dirty="0"/>
-              <a:t>stays the same</a:t>
-            </a:r>
-            <a:r>
-              <a:rPr lang="en-US" dirty="0"/>
-              <a:t>, the result </a:t>
-            </a:r>
-            <a:r>
-              <a:rPr lang="en-US" b="1" dirty="0"/>
-              <a:t>will be very different</a:t>
-            </a:r>
-            <a:r>
-              <a:rPr lang="en-US" dirty="0"/>
-              <a:t>.</a:t>
-            </a:r>
-          </a:p>
-          <a:p>
-            <a:r>
-              <a:rPr lang="en-US" dirty="0"/>
-              <a:t>In one case, the explanation will be </a:t>
-            </a:r>
-            <a:r>
-              <a:rPr lang="en-US" b="1" dirty="0"/>
-              <a:t>more academic</a:t>
-            </a:r>
-            <a:r>
-              <a:rPr lang="en-US" dirty="0"/>
-              <a:t>.</a:t>
-            </a:r>
-            <a:br>
-              <a:rPr lang="en-US" dirty="0"/>
-            </a:br>
-            <a:r>
-              <a:rPr lang="en-US" dirty="0"/>
-              <a:t>In the other, it will </a:t>
-            </a:r>
-            <a:r>
-              <a:rPr lang="en-US" b="1" dirty="0"/>
-              <a:t>be simpler </a:t>
-            </a:r>
-            <a:r>
-              <a:rPr lang="en-US" dirty="0"/>
-              <a:t>and more empathetic.</a:t>
-            </a:r>
-          </a:p>
-          <a:p>
-            <a:pPr lvl="1"/>
-            <a:r>
-              <a:rPr lang="en-US" dirty="0"/>
-              <a:t>So in simple terms:</a:t>
-            </a:r>
-            <a:br>
-              <a:rPr lang="en-US" dirty="0"/>
-            </a:br>
-            <a:r>
-              <a:rPr lang="en-US" dirty="0"/>
-              <a:t>👉 </a:t>
-            </a:r>
-            <a:r>
-              <a:rPr lang="en-US" b="1" dirty="0"/>
-              <a:t>The prompt defines </a:t>
-            </a:r>
-            <a:r>
-              <a:rPr lang="en-US" b="1" i="1" dirty="0"/>
-              <a:t>what</a:t>
-            </a:r>
-            <a:r>
-              <a:rPr lang="en-US" b="1" dirty="0"/>
-              <a:t> we want</a:t>
-            </a:r>
-            <a:br>
-              <a:rPr lang="en-US" dirty="0"/>
-            </a:br>
-            <a:r>
-              <a:rPr lang="en-US" dirty="0"/>
-              <a:t>👉 </a:t>
-            </a:r>
-            <a:r>
-              <a:rPr lang="en-US" b="1" dirty="0"/>
-              <a:t>The context defines </a:t>
-            </a:r>
-            <a:r>
-              <a:rPr lang="en-US" b="1" i="1" dirty="0"/>
-              <a:t>how</a:t>
-            </a:r>
-            <a:r>
-              <a:rPr lang="en-US" b="1" dirty="0"/>
-              <a:t> it should be delivered</a:t>
-            </a:r>
-          </a:p>
-          <a:p>
-            <a:r>
-              <a:rPr lang="en-US" dirty="0"/>
-              <a:t>And together, they </a:t>
-            </a:r>
-            <a:r>
-              <a:rPr lang="en-US" b="1" dirty="0"/>
-              <a:t>shape the final result.</a:t>
-            </a:r>
-          </a:p>
-          <a:p>
-            <a:r>
-              <a:rPr lang="en-US" dirty="0"/>
-              <a:t>To make this more reliable, we introduced a </a:t>
-            </a:r>
-            <a:r>
-              <a:rPr lang="en-US" b="1" dirty="0"/>
-              <a:t>prompt management system</a:t>
-            </a:r>
-            <a:r>
-              <a:rPr lang="en-US" dirty="0"/>
-              <a:t>.</a:t>
-            </a:r>
-          </a:p>
-          <a:p>
-            <a:r>
-              <a:rPr lang="en-US" dirty="0"/>
-              <a:t>With </a:t>
-            </a:r>
-            <a:r>
-              <a:rPr lang="en-US" b="1" dirty="0"/>
-              <a:t>this system, we can</a:t>
-            </a:r>
-            <a:r>
-              <a:rPr lang="en-US" dirty="0"/>
-              <a:t>:</a:t>
-            </a:r>
-          </a:p>
-          <a:p>
-            <a:pPr lvl="1"/>
-            <a:r>
-              <a:rPr lang="en-US" dirty="0"/>
-              <a:t>👉Store and version prompts and contexts </a:t>
-            </a:r>
-          </a:p>
-          <a:p>
-            <a:pPr lvl="1"/>
-            <a:r>
-              <a:rPr lang="en-US" dirty="0"/>
-              <a:t>👉Test them in a playground </a:t>
-            </a:r>
-          </a:p>
-          <a:p>
-            <a:pPr lvl="1"/>
-            <a:r>
-              <a:rPr lang="en-US" dirty="0"/>
-              <a:t>👉Run them across different modules </a:t>
-            </a:r>
-          </a:p>
-          <a:p>
-            <a:pPr lvl="1"/>
-            <a:r>
-              <a:rPr lang="en-US" dirty="0"/>
-              <a:t>👉Create datasets to evaluate responses </a:t>
-            </a:r>
-          </a:p>
-          <a:p>
-            <a:pPr lvl="1"/>
-            <a:r>
-              <a:rPr lang="en-US" dirty="0"/>
-              <a:t>👉And continuously refine everything based on the results </a:t>
-            </a:r>
-          </a:p>
-          <a:p>
-            <a:r>
-              <a:rPr lang="en-US" dirty="0"/>
-              <a:t>This allows us to systematically </a:t>
-            </a:r>
-            <a:r>
-              <a:rPr lang="en-US" b="1" dirty="0"/>
-              <a:t>improve how the AI behaves in our platform.</a:t>
-            </a:r>
-          </a:p>
-          <a:p>
-            <a:r>
-              <a:rPr lang="en-US" dirty="0"/>
-              <a:t>So in the end, this is </a:t>
-            </a:r>
-            <a:r>
-              <a:rPr lang="en-US" b="1" dirty="0"/>
-              <a:t>not just a simple chatbot. </a:t>
-            </a:r>
-            <a:r>
-              <a:rPr lang="en-US" dirty="0"/>
-              <a:t>It’s a </a:t>
-            </a:r>
-            <a:r>
-              <a:rPr lang="en-US" b="1" dirty="0"/>
-              <a:t>controlled and evolving system </a:t>
-            </a:r>
-            <a:r>
-              <a:rPr lang="en-US" dirty="0"/>
-              <a:t>for working with LLMs.</a:t>
-            </a:r>
-          </a:p>
-        </p:txBody>
-      </p:sp>
-      <p:sp>
-        <p:nvSpPr>
-          <p:cNvPr id="4" name="Slide Number Placeholder 3"/>
-          <p:cNvSpPr>
-            <a:spLocks noGrp="1"/>
-          </p:cNvSpPr>
-          <p:nvPr>
-            <p:ph type="sldNum" sz="quarter" idx="5"/>
-          </p:nvPr>
-        </p:nvSpPr>
-        <p:spPr/>
-        <p:txBody>
-          <a:bodyPr/>
-          <a:lstStyle/>
-          <a:p>
-            <a:fld id="{D46C3B8C-8082-4473-8897-3B8AB5081CC5}" type="slidenum">
-              <a:rPr lang="LID4096" smtClean="0"/>
-              <a:t>7</a:t>
-            </a:fld>
-            <a:endParaRPr lang="LID4096"/>
-          </a:p>
-        </p:txBody>
-      </p:sp>
-    </p:spTree>
-    <p:extLst>
-      <p:ext uri="{BB962C8B-B14F-4D97-AF65-F5344CB8AC3E}">
-        <p14:creationId xmlns:p14="http://schemas.microsoft.com/office/powerpoint/2010/main" val="4187562878"/>
-      </p:ext>
-    </p:extLst>
-  </p:cSld>
-  <p:clrMapOvr>
-    <a:masterClrMapping/>
-  </p:clrMapOvr>
-</p:notes>
-</file>
-
-<file path=ppt/notesSlides/notesSlide8.xml><?xml version="1.0" encoding="utf-8"?>
-<p:notes xmlns:a="http://schemas.openxmlformats.org/drawingml/2006/main" xmlns:r="http://schemas.openxmlformats.org/officeDocument/2006/relationships" xmlns:p="http://schemas.openxmlformats.org/presentationml/2006/main">
-  <p:cSld>
-    <p:spTree>
-      <p:nvGrpSpPr>
-        <p:cNvPr id="1" name=""/>
-        <p:cNvGrpSpPr/>
-        <p:nvPr/>
-      </p:nvGrpSpPr>
-      <p:grpSpPr>
-        <a:xfrm>
-          <a:off x="0" y="0"/>
-          <a:ext cx="0" cy="0"/>
-          <a:chOff x="0" y="0"/>
-          <a:chExt cx="0" cy="0"/>
-        </a:xfrm>
-      </p:grpSpPr>
-      <p:sp>
-        <p:nvSpPr>
-          <p:cNvPr id="2" name="Slide Image Placeholder 1"/>
-          <p:cNvSpPr>
-            <a:spLocks noGrp="1" noRot="1" noChangeAspect="1"/>
-          </p:cNvSpPr>
-          <p:nvPr>
-            <p:ph type="sldImg"/>
-          </p:nvPr>
-        </p:nvSpPr>
-        <p:spPr/>
-      </p:sp>
-      <p:sp>
-        <p:nvSpPr>
-          <p:cNvPr id="3" name="Notes Placeholder 2"/>
-          <p:cNvSpPr>
-            <a:spLocks noGrp="1"/>
-          </p:cNvSpPr>
-          <p:nvPr>
-            <p:ph type="body" idx="1"/>
-          </p:nvPr>
-        </p:nvSpPr>
-        <p:spPr/>
-        <p:txBody>
-          <a:bodyPr/>
-          <a:lstStyle/>
-          <a:p>
-            <a:r>
-              <a:rPr lang="en-US" dirty="0"/>
               <a:t>The last plugin I want to show in more detail is the </a:t>
             </a:r>
             <a:r>
@@ -3293,6 +2744,10 @@
             </a:r>
           </a:p>
           <a:p>
+            <a:pPr lvl="1"/>
+            <a:endParaRPr lang="en-US" dirty="0"/>
+          </a:p>
+          <a:p>
             <a:r>
               <a:rPr lang="en-US" dirty="0"/>
               <a:t>On the professional side, we provide a dedicated </a:t>
@@ -3323,28 +2778,21 @@
             <a:pPr lvl="1"/>
             <a:r>
               <a:rPr lang="en-US" dirty="0"/>
-              <a:t>👉 Receive alerts in critical situations </a:t>
+              <a:t>👉 Receive alerts and notifications</a:t>
             </a:r>
           </a:p>
           <a:p>
             <a:pPr lvl="1"/>
             <a:r>
               <a:rPr lang="en-US" dirty="0"/>
-              <a:t>👉 Prepare draft responses </a:t>
+              <a:t>👉 Communicate with the patient  </a:t>
             </a:r>
           </a:p>
           <a:p>
             <a:pPr lvl="1"/>
             <a:r>
               <a:rPr lang="en-US" dirty="0"/>
-              <a:t>👉 And step into the conversation whenever needed </a:t>
-            </a:r>
-          </a:p>
-          <a:p>
-            <a:pPr lvl="1"/>
-            <a:r>
-              <a:rPr lang="en-US" dirty="0"/>
-              <a:t>👉 they can communicate with the patient from the dashboard</a:t>
+              <a:t>👉 Use AI to improve the responses to the patients</a:t>
             </a:r>
           </a:p>
           <a:p>
@@ -3371,19 +2819,19 @@
             </a:r>
             <a:r>
               <a:rPr lang="en-US" b="1" dirty="0"/>
-              <a:t>Read summaries and write notes </a:t>
-            </a:r>
-            <a:r>
-              <a:rPr lang="en-US" dirty="0"/>
-              <a:t>(Here I want to add some remark and relate it to the </a:t>
+              <a:t>Create summaries and write notes </a:t>
+            </a:r>
+            <a:r>
+              <a:rPr lang="en-US" b="0" dirty="0"/>
+              <a:t>for the patients</a:t>
             </a:r>
             <a:r>
               <a:rPr lang="en-US" b="1" dirty="0"/>
-              <a:t>context that I explained in the previous slide</a:t>
-            </a:r>
-            <a:r>
-              <a:rPr lang="en-US" dirty="0"/>
-              <a:t>. These notes can also be used as additional </a:t>
+              <a:t> </a:t>
+            </a:r>
+            <a:r>
+              <a:rPr lang="en-US" dirty="0"/>
+              <a:t>(Here I want to relate  to the previous slide where I explained the </a:t>
             </a:r>
             <a:r>
               <a:rPr lang="en-US" b="1" dirty="0"/>
@@ -3391,16 +2839,50 @@
             </a:r>
             <a:r>
               <a:rPr lang="en-US" dirty="0"/>
+              <a:t>.</a:t>
+            </a:r>
+          </a:p>
+          <a:p>
+            <a:pPr marL="457200" marR="0" lvl="1" indent="0" algn="l" defTabSz="914400" rtl="0" eaLnBrk="1" fontAlgn="auto" latinLnBrk="0" hangingPunct="1">
+              <a:lnSpc>
+                <a:spcPct val="100000"/>
+              </a:lnSpc>
+              <a:spcBef>
+                <a:spcPts val="0"/>
+              </a:spcBef>
+              <a:spcAft>
+                <a:spcPts val="0"/>
+              </a:spcAft>
+              <a:buClrTx/>
+              <a:buSzTx/>
+              <a:buFontTx/>
+              <a:buNone/>
+              <a:tabLst/>
+              <a:defRPr/>
+            </a:pPr>
+            <a:r>
+              <a:rPr lang="en-US" dirty="0"/>
+              <a:t>These notes and summaries can be used as additional </a:t>
+            </a:r>
+            <a:r>
+              <a:rPr lang="en-US" b="1" dirty="0"/>
+              <a:t>context</a:t>
+            </a:r>
+            <a:r>
+              <a:rPr lang="en-US" dirty="0"/>
               <a:t> for the AI, helping to </a:t>
             </a:r>
             <a:r>
               <a:rPr lang="en-US" b="1" dirty="0"/>
-              <a:t>improve the relevance and quality </a:t>
-            </a:r>
-            <a:r>
-              <a:rPr lang="en-US" dirty="0"/>
-              <a:t>of responses over time.)</a:t>
-            </a:r>
+              <a:t>improve the quality </a:t>
+            </a:r>
+            <a:r>
+              <a:rPr lang="en-US" dirty="0"/>
+              <a:t>of the responses)</a:t>
+            </a:r>
+          </a:p>
+          <a:p>
+            <a:endParaRPr lang="en-US" dirty="0"/>
           </a:p>
           <a:p>
             <a:r>
@@ -3441,6 +2923,176 @@
       <p:sp>
         <p:nvSpPr>
           <p:cNvPr id="4" name="Slide Number Placeholder 3"/>
+          <p:cNvSpPr>
+            <a:spLocks noGrp="1"/>
+          </p:cNvSpPr>
+          <p:nvPr>
+            <p:ph type="sldNum" sz="quarter" idx="5"/>
+          </p:nvPr>
+        </p:nvSpPr>
+        <p:spPr/>
+        <p:txBody>
+          <a:bodyPr/>
+          <a:lstStyle/>
+          <a:p>
+            <a:fld id="{D46C3B8C-8082-4473-8897-3B8AB5081CC5}" type="slidenum">
+              <a:rPr lang="LID4096" smtClean="0"/>
+              <a:t>7</a:t>
+            </a:fld>
+            <a:endParaRPr lang="LID4096"/>
+          </a:p>
+        </p:txBody>
+      </p:sp>
+    </p:spTree>
+    <p:extLst>
+      <p:ext uri="{BB962C8B-B14F-4D97-AF65-F5344CB8AC3E}">
+        <p14:creationId xmlns:p14="http://schemas.microsoft.com/office/powerpoint/2010/main" val="850790933"/>
+      </p:ext>
+    </p:extLst>
+  </p:cSld>
+  <p:clrMapOvr>
+    <a:masterClrMapping/>
+  </p:clrMapOvr>
+</p:notes>
+</file>
+
+<file path=ppt/notesSlides/notesSlide8.xml><?xml version="1.0" encoding="utf-8"?>
+<p:notes xmlns:a="http://schemas.openxmlformats.org/drawingml/2006/main" xmlns:r="http://schemas.openxmlformats.org/officeDocument/2006/relationships" xmlns:p="http://schemas.openxmlformats.org/presentationml/2006/main">
+  <p:cSld>
+    <p:spTree>
+      <p:nvGrpSpPr>
+        <p:cNvPr id="1" name="">
+          <a:extLst>
+            <a:ext uri="{FF2B5EF4-FFF2-40B4-BE49-F238E27FC236}">
+              <a16:creationId xmlns:a16="http://schemas.microsoft.com/office/drawing/2014/main" id="{06F5586F-C6BA-379A-E0A2-27CA9930A54A}"/>
+            </a:ext>
+          </a:extLst>
+        </p:cNvPr>
+        <p:cNvGrpSpPr/>
+        <p:nvPr/>
+      </p:nvGrpSpPr>
+      <p:grpSpPr>
+        <a:xfrm>
+          <a:off x="0" y="0"/>
+          <a:ext cx="0" cy="0"/>
+          <a:chOff x="0" y="0"/>
+          <a:chExt cx="0" cy="0"/>
+        </a:xfrm>
+      </p:grpSpPr>
+      <p:sp>
+        <p:nvSpPr>
+          <p:cNvPr id="2" name="Slide Image Placeholder 1">
+            <a:extLst>
+              <a:ext uri="{FF2B5EF4-FFF2-40B4-BE49-F238E27FC236}">
+                <a16:creationId xmlns:a16="http://schemas.microsoft.com/office/drawing/2014/main" id="{5FBB6F9D-FCF8-3B4C-3957-4A99E6C4322D}"/>
+              </a:ext>
+            </a:extLst>
+          </p:cNvPr>
+          <p:cNvSpPr>
+            <a:spLocks noGrp="1" noRot="1" noChangeAspect="1"/>
+          </p:cNvSpPr>
+          <p:nvPr>
+            <p:ph type="sldImg"/>
+          </p:nvPr>
+        </p:nvSpPr>
+        <p:spPr/>
+      </p:sp>
+      <p:sp>
+        <p:nvSpPr>
+          <p:cNvPr id="3" name="Notes Placeholder 2">
+            <a:extLst>
+              <a:ext uri="{FF2B5EF4-FFF2-40B4-BE49-F238E27FC236}">
+                <a16:creationId xmlns:a16="http://schemas.microsoft.com/office/drawing/2014/main" id="{C21A1300-85C5-12E1-F951-995C01D38CB2}"/>
+              </a:ext>
+            </a:extLst>
+          </p:cNvPr>
+          <p:cNvSpPr>
+            <a:spLocks noGrp="1"/>
+          </p:cNvSpPr>
+          <p:nvPr>
+            <p:ph type="body" idx="1"/>
+          </p:nvPr>
+        </p:nvSpPr>
+        <p:spPr/>
+        <p:txBody>
+          <a:bodyPr/>
+          <a:lstStyle/>
+          <a:p>
+            <a:r>
+              <a:rPr lang="en-US" dirty="0"/>
+              <a:t>Just to briefly mention — the platform also comes with a </a:t>
+            </a:r>
+            <a:r>
+              <a:rPr lang="en-US" b="1" dirty="0"/>
+              <a:t>native mobile app</a:t>
+            </a:r>
+            <a:r>
+              <a:rPr lang="en-US" dirty="0"/>
+              <a:t>.</a:t>
+            </a:r>
+          </a:p>
+          <a:p>
+            <a:br>
+              <a:rPr lang="en-US" dirty="0"/>
+            </a:br>
+            <a:r>
+              <a:rPr lang="en-US" b="1" dirty="0"/>
+              <a:t>Not every study </a:t>
+            </a:r>
+            <a:r>
+              <a:rPr lang="en-US" dirty="0"/>
+              <a:t>works well on desktop or in the browser, and a mobile app </a:t>
+            </a:r>
+            <a:r>
+              <a:rPr lang="en-US" b="1" dirty="0"/>
+              <a:t>can really boost engagement.</a:t>
+            </a:r>
+          </a:p>
+          <a:p>
+            <a:endParaRPr lang="en-US" b="1" dirty="0"/>
+          </a:p>
+          <a:p>
+            <a:r>
+              <a:rPr lang="en-US" dirty="0"/>
+              <a:t>It makes it easier for users to </a:t>
+            </a:r>
+            <a:r>
+              <a:rPr lang="en-US" b="1" dirty="0"/>
+              <a:t>participate and stay active.</a:t>
+            </a:r>
+          </a:p>
+          <a:p>
+            <a:br>
+              <a:rPr lang="en-US" dirty="0"/>
+            </a:br>
+            <a:r>
+              <a:rPr lang="en-US" b="1" dirty="0"/>
+              <a:t>And the best part is</a:t>
+            </a:r>
+            <a:r>
+              <a:rPr lang="en-US" dirty="0"/>
+              <a:t>, everything you’ve already built for the web </a:t>
+            </a:r>
+            <a:r>
+              <a:rPr lang="en-US" b="1" dirty="0"/>
+              <a:t>works seamlessly </a:t>
+            </a:r>
+            <a:r>
+              <a:rPr lang="en-US" dirty="0"/>
+              <a:t>in the app too.</a:t>
+            </a:r>
+          </a:p>
+        </p:txBody>
+      </p:sp>
+      <p:sp>
+        <p:nvSpPr>
+          <p:cNvPr id="4" name="Slide Number Placeholder 3">
+            <a:extLst>
+              <a:ext uri="{FF2B5EF4-FFF2-40B4-BE49-F238E27FC236}">
+                <a16:creationId xmlns:a16="http://schemas.microsoft.com/office/drawing/2014/main" id="{003C822A-80BB-28E1-4639-9588562E589E}"/>
+              </a:ext>
+            </a:extLst>
+          </p:cNvPr>
           <p:cNvSpPr>
             <a:spLocks noGrp="1"/>
           </p:cNvSpPr>
@@ -3464,7 +3116,7 @@
     </p:spTree>
     <p:extLst>
       <p:ext uri="{BB962C8B-B14F-4D97-AF65-F5344CB8AC3E}">
-        <p14:creationId xmlns:p14="http://schemas.microsoft.com/office/powerpoint/2010/main" val="850790933"/>
+        <p14:creationId xmlns:p14="http://schemas.microsoft.com/office/powerpoint/2010/main" val="3189829186"/>
       </p:ext>
     </p:extLst>
   </p:cSld>
@@ -3520,119 +3172,7 @@
           <a:p>
             <a:r>
               <a:rPr lang="en-US" dirty="0"/>
-              <a:t>Another feature I’d like to show you is our </a:t>
-            </a:r>
-            <a:r>
-              <a:rPr lang="en-US" b="1" dirty="0"/>
-              <a:t>mobile application </a:t>
-            </a:r>
-            <a:r>
-              <a:rPr lang="en-US" dirty="0"/>
-              <a:t>— and why it really matters.</a:t>
-            </a:r>
-          </a:p>
-          <a:p>
-            <a:endParaRPr lang="en-US" dirty="0"/>
-          </a:p>
-          <a:p>
-            <a:r>
-              <a:rPr lang="en-US" dirty="0"/>
-              <a:t>Many studies are simply </a:t>
-            </a:r>
-            <a:r>
-              <a:rPr lang="en-US" b="1" dirty="0"/>
-              <a:t>not well suited for a website or desktop</a:t>
-            </a:r>
-            <a:r>
-              <a:rPr lang="en-US" dirty="0"/>
-              <a:t> use only. We want to reach people who are </a:t>
-            </a:r>
-            <a:r>
-              <a:rPr lang="en-US" b="1" dirty="0"/>
-              <a:t>not sitting in front of a computer </a:t>
-            </a:r>
-            <a:r>
-              <a:rPr lang="en-US" dirty="0"/>
-              <a:t>all day. These users often </a:t>
-            </a:r>
-            <a:r>
-              <a:rPr lang="en-US" b="1" dirty="0"/>
-              <a:t>have busy lives</a:t>
-            </a:r>
-            <a:r>
-              <a:rPr lang="en-US" dirty="0"/>
-              <a:t>, and that’s exactly where mobile apps become very valuable.</a:t>
-            </a:r>
-          </a:p>
-          <a:p>
-            <a:endParaRPr lang="en-US" dirty="0"/>
-          </a:p>
-          <a:p>
-            <a:r>
-              <a:rPr lang="en-US" dirty="0"/>
-              <a:t>With mobile, we can use </a:t>
-            </a:r>
-            <a:r>
-              <a:rPr lang="en-US" b="1" dirty="0"/>
-              <a:t>push notifications</a:t>
-            </a:r>
-            <a:r>
-              <a:rPr lang="en-US" dirty="0"/>
-              <a:t> and native device features </a:t>
-            </a:r>
-            <a:r>
-              <a:rPr lang="en-US" b="1" dirty="0"/>
-              <a:t>to reach users </a:t>
-            </a:r>
-            <a:r>
-              <a:rPr lang="en-US" dirty="0"/>
-              <a:t>at the right moment. It gives them </a:t>
-            </a:r>
-            <a:r>
-              <a:rPr lang="en-US" b="1" dirty="0"/>
-              <a:t>quick and easy access to enter data </a:t>
-            </a:r>
-            <a:r>
-              <a:rPr lang="en-US" dirty="0"/>
-              <a:t>whenever it’s convenient for them.</a:t>
-            </a:r>
-          </a:p>
-          <a:p>
-            <a:endParaRPr lang="en-US" dirty="0"/>
-          </a:p>
-          <a:p>
-            <a:r>
-              <a:rPr lang="en-US" dirty="0"/>
-              <a:t>In the end, this can significantly </a:t>
-            </a:r>
-            <a:r>
-              <a:rPr lang="en-US" b="1" dirty="0"/>
-              <a:t>increase user engagement</a:t>
-            </a:r>
-            <a:r>
-              <a:rPr lang="en-US" dirty="0"/>
-              <a:t>. When users are contacted at the right time, they’re </a:t>
-            </a:r>
-            <a:r>
-              <a:rPr lang="en-US" b="1" dirty="0"/>
-              <a:t>more likely to respond, stay active, and continue using the app</a:t>
-            </a:r>
-            <a:r>
-              <a:rPr lang="en-US" dirty="0"/>
-              <a:t>.</a:t>
-            </a:r>
-          </a:p>
-          <a:p>
-            <a:endParaRPr lang="en-US" dirty="0"/>
-          </a:p>
-          <a:p>
-            <a:r>
-              <a:rPr lang="en-US" dirty="0"/>
-              <a:t>And the best part is: </a:t>
-            </a:r>
-            <a:r>
-              <a:rPr lang="en-US" b="1" dirty="0"/>
-              <a:t>everything can be integrated directly into </a:t>
+              <a:t>If we compare </a:t>
             </a:r>
             <a:r>
               <a:rPr lang="en-US" b="1" dirty="0" err="1"/>
@@ -3640,29 +3180,150 @@
             </a:r>
             <a:r>
               <a:rPr lang="en-US" dirty="0"/>
-              <a:t>. All the functionalities you’ve already created can </a:t>
+              <a:t> to other systems, it’s important to be fair.</a:t>
+            </a:r>
+          </a:p>
+          <a:p>
+            <a:r>
+              <a:rPr lang="en-US" dirty="0"/>
+              <a:t>There are several strong open-source tools, such as </a:t>
+            </a:r>
+            <a:r>
+              <a:rPr lang="en-US" dirty="0" err="1"/>
+              <a:t>LimeSurvey</a:t>
+            </a:r>
+            <a:r>
+              <a:rPr lang="en-US" dirty="0"/>
+              <a:t>, JATOS, </a:t>
+            </a:r>
+            <a:r>
+              <a:rPr lang="en-US" dirty="0" err="1"/>
+              <a:t>formr</a:t>
+            </a:r>
+            <a:r>
+              <a:rPr lang="en-US" dirty="0"/>
+              <a:t>, or Moodle.</a:t>
+            </a:r>
+          </a:p>
+          <a:p>
+            <a:r>
+              <a:rPr lang="en-US" dirty="0"/>
+              <a:t>Each of these systems is excellent in its own area:</a:t>
+            </a:r>
+          </a:p>
+          <a:p>
+            <a:pPr lvl="1"/>
+            <a:r>
+              <a:rPr lang="en-US" dirty="0"/>
+              <a:t>👉JATOS and </a:t>
+            </a:r>
+            <a:r>
+              <a:rPr lang="en-US" dirty="0" err="1"/>
+              <a:t>formr</a:t>
+            </a:r>
+            <a:r>
+              <a:rPr lang="en-US" dirty="0"/>
+              <a:t> are very strong for online studies </a:t>
+            </a:r>
+          </a:p>
+          <a:p>
+            <a:pPr lvl="1"/>
+            <a:r>
+              <a:rPr lang="en-US" dirty="0"/>
+              <a:t>👉</a:t>
+            </a:r>
+            <a:r>
+              <a:rPr lang="en-US" dirty="0" err="1"/>
+              <a:t>LimeSurvey</a:t>
+            </a:r>
+            <a:r>
+              <a:rPr lang="en-US" dirty="0"/>
+              <a:t> is specialized in surveys </a:t>
+            </a:r>
+          </a:p>
+          <a:p>
+            <a:pPr lvl="1"/>
+            <a:r>
+              <a:rPr lang="en-US" dirty="0"/>
+              <a:t>👉Moodle is designed for learning environments </a:t>
+            </a:r>
+          </a:p>
+          <a:p>
+            <a:pPr lvl="1"/>
+            <a:endParaRPr lang="en-US" dirty="0"/>
+          </a:p>
+          <a:p>
+            <a:r>
+              <a:rPr lang="en-US" dirty="0"/>
+              <a:t>What makes </a:t>
+            </a:r>
+            <a:r>
+              <a:rPr lang="en-US" b="1" dirty="0" err="1"/>
+              <a:t>SelfHelp</a:t>
+            </a:r>
+            <a:r>
+              <a:rPr lang="en-US" dirty="0"/>
+              <a:t> different is not that it replaces these tools.</a:t>
+            </a:r>
+          </a:p>
+          <a:p>
+            <a:endParaRPr lang="en-US" dirty="0"/>
+          </a:p>
+          <a:p>
+            <a:r>
+              <a:rPr lang="en-US" dirty="0"/>
+              <a:t>The real strength lies in the </a:t>
             </a:r>
             <a:r>
               <a:rPr lang="en-US" b="1" dirty="0"/>
-              <a:t>be seamlessly rendered</a:t>
-            </a:r>
-            <a:r>
-              <a:rPr lang="en-US" dirty="0"/>
-              <a:t> inside the native mobile app.</a:t>
-            </a:r>
-          </a:p>
-          <a:p>
-            <a:endParaRPr lang="en-US"/>
-          </a:p>
-          <a:p>
-            <a:r>
-              <a:rPr lang="en-US"/>
-              <a:t>That’s </a:t>
-            </a:r>
-            <a:r>
-              <a:rPr lang="en-US" dirty="0"/>
-              <a:t>where the real value comes in.</a:t>
-            </a:r>
+              <a:t>connection between all components bringing them all within a single platform.</a:t>
+            </a:r>
+          </a:p>
+          <a:p>
+            <a:endParaRPr lang="en-US" b="1" dirty="0"/>
+          </a:p>
+          <a:p>
+            <a:r>
+              <a:rPr lang="en-US" dirty="0"/>
+              <a:t>So if someone </a:t>
+            </a:r>
+            <a:r>
+              <a:rPr lang="en-US" b="1" dirty="0"/>
+              <a:t>only needs one specific function</a:t>
+            </a:r>
+            <a:r>
+              <a:rPr lang="en-US" dirty="0"/>
+              <a:t>, a specialized tool might be the better choice.</a:t>
+            </a:r>
+          </a:p>
+          <a:p>
+            <a:r>
+              <a:rPr lang="en-US" dirty="0"/>
+              <a:t>But if someone is looking for an integrated, </a:t>
+            </a:r>
+            <a:r>
+              <a:rPr lang="en-US" b="1" dirty="0"/>
+              <a:t>end-to-end solution</a:t>
+            </a:r>
+            <a:r>
+              <a:rPr lang="en-US" dirty="0"/>
+              <a:t>, then </a:t>
+            </a:r>
+            <a:r>
+              <a:rPr lang="en-US" dirty="0" err="1"/>
+              <a:t>SelfHelp</a:t>
+            </a:r>
+            <a:r>
+              <a:rPr lang="en-US" dirty="0"/>
+              <a:t> really </a:t>
+            </a:r>
+            <a:r>
+              <a:rPr lang="en-US" b="1" dirty="0"/>
+              <a:t>stand outs.</a:t>
+            </a:r>
+          </a:p>
+          <a:p>
+            <a:endParaRPr lang="LID4096" dirty="0"/>
           </a:p>
         </p:txBody>
       </p:sp>
@@ -3692,7 +3353,7 @@
     </p:spTree>
     <p:extLst>
       <p:ext uri="{BB962C8B-B14F-4D97-AF65-F5344CB8AC3E}">
-        <p14:creationId xmlns:p14="http://schemas.microsoft.com/office/powerpoint/2010/main" val="925353383"/>
+        <p14:creationId xmlns:p14="http://schemas.microsoft.com/office/powerpoint/2010/main" val="4003261056"/>
       </p:ext>
     </p:extLst>
   </p:cSld>
@@ -7335,236 +6996,6 @@
           <p:cNvPr id="5" name="Picture 4">
             <a:extLst>
               <a:ext uri="{FF2B5EF4-FFF2-40B4-BE49-F238E27FC236}">
-                <a16:creationId xmlns:a16="http://schemas.microsoft.com/office/drawing/2014/main" id="{85725B56-3A39-34AE-2184-427195B87AE4}"/>
-              </a:ext>
-            </a:extLst>
-          </p:cNvPr>
-          <p:cNvPicPr>
-            <a:picLocks noChangeAspect="1"/>
-          </p:cNvPicPr>
-          <p:nvPr/>
-        </p:nvPicPr>
-        <p:blipFill>
-          <a:blip r:embed="rId3">
-            <a:extLst>
-              <a:ext uri="{28A0092B-C50C-407E-A947-70E740481C1C}">
-                <a14:useLocalDpi xmlns:a14="http://schemas.microsoft.com/office/drawing/2010/main" val="0"/>
-              </a:ext>
-            </a:extLst>
-          </a:blip>
-          <a:srcRect b="19"/>
-          <a:stretch>
-            <a:fillRect/>
-          </a:stretch>
-        </p:blipFill>
-        <p:spPr>
-          <a:xfrm>
-            <a:off x="20" y="1282"/>
-            <a:ext cx="12191980" cy="6856718"/>
-          </a:xfrm>
-          <a:prstGeom prst="rect">
-            <a:avLst/>
-          </a:prstGeom>
-        </p:spPr>
-      </p:pic>
-    </p:spTree>
-    <p:extLst>
-      <p:ext uri="{BB962C8B-B14F-4D97-AF65-F5344CB8AC3E}">
-        <p14:creationId xmlns:p14="http://schemas.microsoft.com/office/powerpoint/2010/main" val="1345492080"/>
-      </p:ext>
-    </p:extLst>
-  </p:cSld>
-  <p:clrMapOvr>
-    <a:masterClrMapping/>
-  </p:clrMapOvr>
-</p:sld>
-</file>
-
-<file path=ppt/slides/slide11.xml><?xml version="1.0" encoding="utf-8"?>
-<p:sld xmlns:a="http://schemas.openxmlformats.org/drawingml/2006/main" xmlns:r="http://schemas.openxmlformats.org/officeDocument/2006/relationships" xmlns:p="http://schemas.openxmlformats.org/presentationml/2006/main">
-  <p:cSld>
-    <p:bg>
-      <p:bgPr>
-        <a:solidFill>
-          <a:schemeClr val="bg1"/>
-        </a:solidFill>
-        <a:effectLst/>
-      </p:bgPr>
-    </p:bg>
-    <p:spTree>
-      <p:nvGrpSpPr>
-        <p:cNvPr id="1" name=""/>
-        <p:cNvGrpSpPr/>
-        <p:nvPr/>
-      </p:nvGrpSpPr>
-      <p:grpSpPr>
-        <a:xfrm>
-          <a:off x="0" y="0"/>
-          <a:ext cx="0" cy="0"/>
-          <a:chOff x="0" y="0"/>
-          <a:chExt cx="0" cy="0"/>
-        </a:xfrm>
-      </p:grpSpPr>
-      <p:sp>
-        <p:nvSpPr>
-          <p:cNvPr id="10" name="Rectangle 9">
-            <a:extLst>
-              <a:ext uri="{FF2B5EF4-FFF2-40B4-BE49-F238E27FC236}">
-                <a16:creationId xmlns:a16="http://schemas.microsoft.com/office/drawing/2014/main" id="{42A4FC2C-047E-45A5-965D-8E1E3BF09BC6}"/>
-              </a:ext>
-              <a:ext uri="{C183D7F6-B498-43B3-948B-1728B52AA6E4}">
-                <adec:decorative xmlns:adec="http://schemas.microsoft.com/office/drawing/2017/decorative" val="1"/>
-              </a:ext>
-            </a:extLst>
-          </p:cNvPr>
-          <p:cNvSpPr>
-            <a:spLocks noGrp="1" noRot="1" noChangeAspect="1" noMove="1" noResize="1" noEditPoints="1" noAdjustHandles="1" noChangeArrowheads="1" noChangeShapeType="1" noTextEdit="1"/>
-          </p:cNvSpPr>
-          <p:nvPr>
-            <p:extLst>
-              <p:ext uri="{386F3935-93C4-4BCD-93E2-E3B085C9AB24}">
-                <p16:designElem xmlns:p16="http://schemas.microsoft.com/office/powerpoint/2015/main" val="1"/>
-              </p:ext>
-            </p:extLst>
-          </p:nvPr>
-        </p:nvSpPr>
-        <p:spPr bwMode="white">
-          <a:xfrm>
-            <a:off x="1524" y="0"/>
-            <a:ext cx="12188952" cy="6858000"/>
-          </a:xfrm>
-          <a:prstGeom prst="rect">
-            <a:avLst/>
-          </a:prstGeom>
-          <a:noFill/>
-          <a:ln>
-            <a:noFill/>
-          </a:ln>
-        </p:spPr>
-        <p:style>
-          <a:lnRef idx="2">
-            <a:schemeClr val="accent1">
-              <a:shade val="50000"/>
-            </a:schemeClr>
-          </a:lnRef>
-          <a:fillRef idx="1">
-            <a:schemeClr val="accent1"/>
-          </a:fillRef>
-          <a:effectRef idx="0">
-            <a:schemeClr val="accent1"/>
-          </a:effectRef>
-          <a:fontRef idx="minor">
-            <a:schemeClr val="lt1"/>
-          </a:fontRef>
-        </p:style>
-        <p:txBody>
-          <a:bodyPr rtlCol="0" anchor="ctr"/>
-          <a:lstStyle>
-            <a:defPPr>
-              <a:defRPr lang="en-US"/>
-            </a:defPPr>
-            <a:lvl1pPr marL="0" algn="l" defTabSz="914400" rtl="0" eaLnBrk="1" latinLnBrk="0" hangingPunct="1">
-              <a:defRPr sz="1800" kern="1200">
-                <a:solidFill>
-                  <a:schemeClr val="lt1"/>
-                </a:solidFill>
-                <a:latin typeface="+mn-lt"/>
-                <a:ea typeface="+mn-ea"/>
-                <a:cs typeface="+mn-cs"/>
-              </a:defRPr>
-            </a:lvl1pPr>
-            <a:lvl2pPr marL="457200" algn="l" defTabSz="914400" rtl="0" eaLnBrk="1" latinLnBrk="0" hangingPunct="1">
-              <a:defRPr sz="1800" kern="1200">
-                <a:solidFill>
-                  <a:schemeClr val="lt1"/>
-                </a:solidFill>
-                <a:latin typeface="+mn-lt"/>
-                <a:ea typeface="+mn-ea"/>
-                <a:cs typeface="+mn-cs"/>
-              </a:defRPr>
-            </a:lvl2pPr>
-            <a:lvl3pPr marL="914400" algn="l" defTabSz="914400" rtl="0" eaLnBrk="1" latinLnBrk="0" hangingPunct="1">
-              <a:defRPr sz="1800" kern="1200">
-                <a:solidFill>
-                  <a:schemeClr val="lt1"/>
-                </a:solidFill>
-                <a:latin typeface="+mn-lt"/>
-                <a:ea typeface="+mn-ea"/>
-                <a:cs typeface="+mn-cs"/>
-              </a:defRPr>
-            </a:lvl3pPr>
-            <a:lvl4pPr marL="1371600" algn="l" defTabSz="914400" rtl="0" eaLnBrk="1" latinLnBrk="0" hangingPunct="1">
-              <a:defRPr sz="1800" kern="1200">
-                <a:solidFill>
-                  <a:schemeClr val="lt1"/>
-                </a:solidFill>
-                <a:latin typeface="+mn-lt"/>
-                <a:ea typeface="+mn-ea"/>
-                <a:cs typeface="+mn-cs"/>
-              </a:defRPr>
-            </a:lvl4pPr>
-            <a:lvl5pPr marL="1828800" algn="l" defTabSz="914400" rtl="0" eaLnBrk="1" latinLnBrk="0" hangingPunct="1">
-              <a:defRPr sz="1800" kern="1200">
-                <a:solidFill>
-                  <a:schemeClr val="lt1"/>
-                </a:solidFill>
-                <a:latin typeface="+mn-lt"/>
-                <a:ea typeface="+mn-ea"/>
-                <a:cs typeface="+mn-cs"/>
-              </a:defRPr>
-            </a:lvl5pPr>
-            <a:lvl6pPr marL="2286000" algn="l" defTabSz="914400" rtl="0" eaLnBrk="1" latinLnBrk="0" hangingPunct="1">
-              <a:defRPr sz="1800" kern="1200">
-                <a:solidFill>
-                  <a:schemeClr val="lt1"/>
-                </a:solidFill>
-                <a:latin typeface="+mn-lt"/>
-                <a:ea typeface="+mn-ea"/>
-                <a:cs typeface="+mn-cs"/>
-              </a:defRPr>
-            </a:lvl6pPr>
-            <a:lvl7pPr marL="2743200" algn="l" defTabSz="914400" rtl="0" eaLnBrk="1" latinLnBrk="0" hangingPunct="1">
-              <a:defRPr sz="1800" kern="1200">
-                <a:solidFill>
-                  <a:schemeClr val="lt1"/>
-                </a:solidFill>
-                <a:latin typeface="+mn-lt"/>
-                <a:ea typeface="+mn-ea"/>
-                <a:cs typeface="+mn-cs"/>
-              </a:defRPr>
-            </a:lvl7pPr>
-            <a:lvl8pPr marL="3200400" algn="l" defTabSz="914400" rtl="0" eaLnBrk="1" latinLnBrk="0" hangingPunct="1">
-              <a:defRPr sz="1800" kern="1200">
-                <a:solidFill>
-                  <a:schemeClr val="lt1"/>
-                </a:solidFill>
-                <a:latin typeface="+mn-lt"/>
-                <a:ea typeface="+mn-ea"/>
-                <a:cs typeface="+mn-cs"/>
-              </a:defRPr>
-            </a:lvl8pPr>
-            <a:lvl9pPr marL="3657600" algn="l" defTabSz="914400" rtl="0" eaLnBrk="1" latinLnBrk="0" hangingPunct="1">
-              <a:defRPr sz="1800" kern="1200">
-                <a:solidFill>
-                  <a:schemeClr val="lt1"/>
-                </a:solidFill>
-                <a:latin typeface="+mn-lt"/>
-                <a:ea typeface="+mn-ea"/>
-                <a:cs typeface="+mn-cs"/>
-              </a:defRPr>
-            </a:lvl9pPr>
-          </a:lstStyle>
-          <a:p>
-            <a:pPr algn="ctr"/>
-            <a:endParaRPr lang="en-US"/>
-          </a:p>
-        </p:txBody>
-      </p:sp>
-      <p:pic>
-        <p:nvPicPr>
-          <p:cNvPr id="5" name="Picture 4">
-            <a:extLst>
-              <a:ext uri="{FF2B5EF4-FFF2-40B4-BE49-F238E27FC236}">
                 <a16:creationId xmlns:a16="http://schemas.microsoft.com/office/drawing/2014/main" id="{434E3024-4A8C-7CBC-07D3-574465EF211B}"/>
               </a:ext>
             </a:extLst>
@@ -7610,7 +7041,7 @@
 </p:sld>
 </file>
 
-<file path=ppt/slides/slide12.xml><?xml version="1.0" encoding="utf-8"?>
+<file path=ppt/slides/slide11.xml><?xml version="1.0" encoding="utf-8"?>
 <p:sld xmlns:a="http://schemas.openxmlformats.org/drawingml/2006/main" xmlns:r="http://schemas.openxmlformats.org/officeDocument/2006/relationships" xmlns:p="http://schemas.openxmlformats.org/presentationml/2006/main">
   <p:cSld>
     <p:bg>
@@ -8255,7 +7686,7 @@
           <p:cNvPr id="5" name="Picture 4">
             <a:extLst>
               <a:ext uri="{FF2B5EF4-FFF2-40B4-BE49-F238E27FC236}">
-                <a16:creationId xmlns:a16="http://schemas.microsoft.com/office/drawing/2014/main" id="{B74DD70F-466C-1D07-0087-31EAE0BC92BD}"/>
+                <a16:creationId xmlns:a16="http://schemas.microsoft.com/office/drawing/2014/main" id="{965E7B72-0553-FB19-AD56-0451B26CB673}"/>
               </a:ext>
             </a:extLst>
           </p:cNvPr>
@@ -8290,7 +7721,7 @@
     </p:spTree>
     <p:extLst>
       <p:ext uri="{BB962C8B-B14F-4D97-AF65-F5344CB8AC3E}">
-        <p14:creationId xmlns:p14="http://schemas.microsoft.com/office/powerpoint/2010/main" val="1860236339"/>
+        <p14:creationId xmlns:p14="http://schemas.microsoft.com/office/powerpoint/2010/main" val="2434668761"/>
       </p:ext>
     </p:extLst>
   </p:cSld>
@@ -8485,7 +7916,7 @@
           <p:cNvPr id="5" name="Picture 4">
             <a:extLst>
               <a:ext uri="{FF2B5EF4-FFF2-40B4-BE49-F238E27FC236}">
-                <a16:creationId xmlns:a16="http://schemas.microsoft.com/office/drawing/2014/main" id="{085D5AA9-2AC5-F074-74EA-90689418CFB9}"/>
+                <a16:creationId xmlns:a16="http://schemas.microsoft.com/office/drawing/2014/main" id="{F67848E1-4385-3A6D-8894-0A768A462515}"/>
               </a:ext>
             </a:extLst>
           </p:cNvPr>
@@ -8520,7 +7951,7 @@
     </p:spTree>
     <p:extLst>
       <p:ext uri="{BB962C8B-B14F-4D97-AF65-F5344CB8AC3E}">
-        <p14:creationId xmlns:p14="http://schemas.microsoft.com/office/powerpoint/2010/main" val="366361176"/>
+        <p14:creationId xmlns:p14="http://schemas.microsoft.com/office/powerpoint/2010/main" val="3396109724"/>
       </p:ext>
     </p:extLst>
   </p:cSld>
@@ -8715,7 +8146,7 @@
           <p:cNvPr id="5" name="Picture 4">
             <a:extLst>
               <a:ext uri="{FF2B5EF4-FFF2-40B4-BE49-F238E27FC236}">
-                <a16:creationId xmlns:a16="http://schemas.microsoft.com/office/drawing/2014/main" id="{965E7B72-0553-FB19-AD56-0451B26CB673}"/>
+                <a16:creationId xmlns:a16="http://schemas.microsoft.com/office/drawing/2014/main" id="{1A3204E8-4D1E-13A2-F577-258778D99F80}"/>
               </a:ext>
             </a:extLst>
           </p:cNvPr>
@@ -8732,7 +8163,7 @@
               </a:ext>
             </a:extLst>
           </a:blip>
-          <a:srcRect b="19"/>
+          <a:srcRect t="19"/>
           <a:stretch>
             <a:fillRect/>
           </a:stretch>
@@ -8750,7 +8181,7 @@
     </p:spTree>
     <p:extLst>
       <p:ext uri="{BB962C8B-B14F-4D97-AF65-F5344CB8AC3E}">
-        <p14:creationId xmlns:p14="http://schemas.microsoft.com/office/powerpoint/2010/main" val="2434668761"/>
+        <p14:creationId xmlns:p14="http://schemas.microsoft.com/office/powerpoint/2010/main" val="3424204975"/>
       </p:ext>
     </p:extLst>
   </p:cSld>
@@ -8773,7 +8204,13 @@
     </p:bg>
     <p:spTree>
       <p:nvGrpSpPr>
-        <p:cNvPr id="1" name=""/>
+        <p:cNvPr id="1" name="">
+          <a:extLst>
+            <a:ext uri="{FF2B5EF4-FFF2-40B4-BE49-F238E27FC236}">
+              <a16:creationId xmlns:a16="http://schemas.microsoft.com/office/drawing/2014/main" id="{8230BBD2-FF55-E99E-C744-3BF1FED42239}"/>
+            </a:ext>
+          </a:extLst>
+        </p:cNvPr>
         <p:cNvGrpSpPr/>
         <p:nvPr/>
       </p:nvGrpSpPr>
@@ -8790,7 +8227,7 @@
           <p:cNvPr id="10" name="Rectangle 9">
             <a:extLst>
               <a:ext uri="{FF2B5EF4-FFF2-40B4-BE49-F238E27FC236}">
-                <a16:creationId xmlns:a16="http://schemas.microsoft.com/office/drawing/2014/main" id="{42A4FC2C-047E-45A5-965D-8E1E3BF09BC6}"/>
+                <a16:creationId xmlns:a16="http://schemas.microsoft.com/office/drawing/2014/main" id="{40512BB3-F708-84FD-D255-AC002DF204BD}"/>
               </a:ext>
               <a:ext uri="{C183D7F6-B498-43B3-948B-1728B52AA6E4}">
                 <adec:decorative xmlns:adec="http://schemas.microsoft.com/office/drawing/2017/decorative" val="1"/>
@@ -8945,7 +8382,7 @@
           <p:cNvPr id="5" name="Picture 4">
             <a:extLst>
               <a:ext uri="{FF2B5EF4-FFF2-40B4-BE49-F238E27FC236}">
-                <a16:creationId xmlns:a16="http://schemas.microsoft.com/office/drawing/2014/main" id="{F67848E1-4385-3A6D-8894-0A768A462515}"/>
+                <a16:creationId xmlns:a16="http://schemas.microsoft.com/office/drawing/2014/main" id="{84778AE2-7F50-53EF-4361-1ACB5E7BFB1C}"/>
               </a:ext>
             </a:extLst>
           </p:cNvPr>
@@ -8962,7 +8399,7 @@
               </a:ext>
             </a:extLst>
           </a:blip>
-          <a:srcRect b="19"/>
+          <a:srcRect t="19"/>
           <a:stretch>
             <a:fillRect/>
           </a:stretch>
@@ -8980,7 +8417,7 @@
     </p:spTree>
     <p:extLst>
       <p:ext uri="{BB962C8B-B14F-4D97-AF65-F5344CB8AC3E}">
-        <p14:creationId xmlns:p14="http://schemas.microsoft.com/office/powerpoint/2010/main" val="3396109724"/>
+        <p14:creationId xmlns:p14="http://schemas.microsoft.com/office/powerpoint/2010/main" val="812791837"/>
       </p:ext>
     </p:extLst>
   </p:cSld>
@@ -9175,7 +8612,7 @@
           <p:cNvPr id="5" name="Picture 4">
             <a:extLst>
               <a:ext uri="{FF2B5EF4-FFF2-40B4-BE49-F238E27FC236}">
-                <a16:creationId xmlns:a16="http://schemas.microsoft.com/office/drawing/2014/main" id="{1A3204E8-4D1E-13A2-F577-258778D99F80}"/>
+                <a16:creationId xmlns:a16="http://schemas.microsoft.com/office/drawing/2014/main" id="{658E8D67-38D8-E01D-D7DE-4C5801F82285}"/>
               </a:ext>
             </a:extLst>
           </p:cNvPr>
@@ -9210,7 +8647,7 @@
     </p:spTree>
     <p:extLst>
       <p:ext uri="{BB962C8B-B14F-4D97-AF65-F5344CB8AC3E}">
-        <p14:creationId xmlns:p14="http://schemas.microsoft.com/office/powerpoint/2010/main" val="3424204975"/>
+        <p14:creationId xmlns:p14="http://schemas.microsoft.com/office/powerpoint/2010/main" val="2377640174"/>
       </p:ext>
     </p:extLst>
   </p:cSld>
@@ -9233,7 +8670,13 @@
     </p:bg>
     <p:spTree>
       <p:nvGrpSpPr>
-        <p:cNvPr id="1" name=""/>
+        <p:cNvPr id="1" name="">
+          <a:extLst>
+            <a:ext uri="{FF2B5EF4-FFF2-40B4-BE49-F238E27FC236}">
+              <a16:creationId xmlns:a16="http://schemas.microsoft.com/office/drawing/2014/main" id="{C27C7169-A39C-CEB8-9D2D-93D92DD02AA7}"/>
+            </a:ext>
+          </a:extLst>
+        </p:cNvPr>
         <p:cNvGrpSpPr/>
         <p:nvPr/>
       </p:nvGrpSpPr>
@@ -9250,7 +8693,7 @@
           <p:cNvPr id="10" name="Rectangle 9">
             <a:extLst>
               <a:ext uri="{FF2B5EF4-FFF2-40B4-BE49-F238E27FC236}">
-                <a16:creationId xmlns:a16="http://schemas.microsoft.com/office/drawing/2014/main" id="{42A4FC2C-047E-45A5-965D-8E1E3BF09BC6}"/>
+                <a16:creationId xmlns:a16="http://schemas.microsoft.com/office/drawing/2014/main" id="{795410E3-DB68-8813-FFC4-7E6CC7D19CB3}"/>
               </a:ext>
               <a:ext uri="{C183D7F6-B498-43B3-948B-1728B52AA6E4}">
                 <adec:decorative xmlns:adec="http://schemas.microsoft.com/office/drawing/2017/decorative" val="1"/>
@@ -9405,7 +8848,7 @@
           <p:cNvPr id="5" name="Picture 4">
             <a:extLst>
               <a:ext uri="{FF2B5EF4-FFF2-40B4-BE49-F238E27FC236}">
-                <a16:creationId xmlns:a16="http://schemas.microsoft.com/office/drawing/2014/main" id="{658E8D67-38D8-E01D-D7DE-4C5801F82285}"/>
+                <a16:creationId xmlns:a16="http://schemas.microsoft.com/office/drawing/2014/main" id="{E5CE2BA7-D5C2-3229-CCE4-79ECFFEC8C3F}"/>
               </a:ext>
             </a:extLst>
           </p:cNvPr>
@@ -9422,7 +8865,7 @@
               </a:ext>
             </a:extLst>
           </a:blip>
-          <a:srcRect t="19"/>
+          <a:srcRect b="19"/>
           <a:stretch>
             <a:fillRect/>
           </a:stretch>
@@ -9440,7 +8883,7 @@
     </p:spTree>
     <p:extLst>
       <p:ext uri="{BB962C8B-B14F-4D97-AF65-F5344CB8AC3E}">
-        <p14:creationId xmlns:p14="http://schemas.microsoft.com/office/powerpoint/2010/main" val="2377640174"/>
+        <p14:creationId xmlns:p14="http://schemas.microsoft.com/office/powerpoint/2010/main" val="848419218"/>
       </p:ext>
     </p:extLst>
   </p:cSld>
@@ -9635,7 +9078,7 @@
           <p:cNvPr id="5" name="Picture 4">
             <a:extLst>
               <a:ext uri="{FF2B5EF4-FFF2-40B4-BE49-F238E27FC236}">
-                <a16:creationId xmlns:a16="http://schemas.microsoft.com/office/drawing/2014/main" id="{27E8089E-20BE-2080-BED7-3CDD253DB3BD}"/>
+                <a16:creationId xmlns:a16="http://schemas.microsoft.com/office/drawing/2014/main" id="{85725B56-3A39-34AE-2184-427195B87AE4}"/>
               </a:ext>
             </a:extLst>
           </p:cNvPr>
@@ -9670,7 +9113,7 @@
     </p:spTree>
     <p:extLst>
       <p:ext uri="{BB962C8B-B14F-4D97-AF65-F5344CB8AC3E}">
-        <p14:creationId xmlns:p14="http://schemas.microsoft.com/office/powerpoint/2010/main" val="4057361830"/>
+        <p14:creationId xmlns:p14="http://schemas.microsoft.com/office/powerpoint/2010/main" val="1345492080"/>
       </p:ext>
     </p:extLst>
   </p:cSld>
